--- a/unam.fi.compilers.g5.01/doc/Presentation-01-Compilers-FinalProject.pptx
+++ b/unam.fi.compilers.g5.01/doc/Presentation-01-Compilers-FinalProject.pptx
@@ -5,58 +5,55 @@
     <p:sldMasterId id="2147483648" r:id="rId1"/>
   </p:sldMasterIdLst>
   <p:notesMasterIdLst>
-    <p:notesMasterId r:id="rId13"/>
+    <p:notesMasterId r:id="rId14"/>
   </p:notesMasterIdLst>
   <p:sldIdLst>
     <p:sldId id="256" r:id="rId2"/>
-    <p:sldId id="267" r:id="rId3"/>
-    <p:sldId id="257" r:id="rId4"/>
-    <p:sldId id="259" r:id="rId5"/>
-    <p:sldId id="260" r:id="rId6"/>
-    <p:sldId id="261" r:id="rId7"/>
-    <p:sldId id="262" r:id="rId8"/>
-    <p:sldId id="263" r:id="rId9"/>
-    <p:sldId id="264" r:id="rId10"/>
-    <p:sldId id="265" r:id="rId11"/>
-    <p:sldId id="266" r:id="rId12"/>
+    <p:sldId id="268" r:id="rId3"/>
+    <p:sldId id="267" r:id="rId4"/>
+    <p:sldId id="257" r:id="rId5"/>
+    <p:sldId id="259" r:id="rId6"/>
+    <p:sldId id="260" r:id="rId7"/>
+    <p:sldId id="261" r:id="rId8"/>
+    <p:sldId id="262" r:id="rId9"/>
+    <p:sldId id="263" r:id="rId10"/>
+    <p:sldId id="264" r:id="rId11"/>
+    <p:sldId id="265" r:id="rId12"/>
+    <p:sldId id="266" r:id="rId13"/>
   </p:sldIdLst>
   <p:sldSz cx="18288000" cy="10287000"/>
   <p:notesSz cx="6858000" cy="9144000"/>
   <p:embeddedFontLst>
     <p:embeddedFont>
-      <p:font typeface="Calibri" panose="020F0502020204030204" pitchFamily="34" charset="0"/>
-      <p:regular r:id="rId14"/>
-      <p:bold r:id="rId15"/>
-      <p:italic r:id="rId16"/>
-      <p:boldItalic r:id="rId17"/>
+      <p:font typeface="Clear Sans Bold" panose="020B0604020202020204" charset="0"/>
+      <p:regular r:id="rId15"/>
     </p:embeddedFont>
     <p:embeddedFont>
-      <p:font typeface="Clear Sans Bold" panose="020B0803030202020304" pitchFamily="34" charset="0"/>
+      <p:font typeface="Helios" panose="020B0604020202020204" charset="0"/>
+      <p:regular r:id="rId16"/>
+    </p:embeddedFont>
+    <p:embeddedFont>
+      <p:font typeface="Helios Bold" panose="020B0604020202020204" charset="0"/>
+      <p:regular r:id="rId17"/>
+    </p:embeddedFont>
+    <p:embeddedFont>
+      <p:font typeface="Helios Italics" panose="020B0604020202020204" charset="0"/>
       <p:regular r:id="rId18"/>
     </p:embeddedFont>
     <p:embeddedFont>
-      <p:font typeface="Helios" panose="020B0504020202020204" pitchFamily="34" charset="0"/>
+      <p:font typeface="Inter Bold" panose="020B0604020202020204" charset="0"/>
       <p:regular r:id="rId19"/>
     </p:embeddedFont>
     <p:embeddedFont>
-      <p:font typeface="Helios Bold" panose="020B0704020202020204" pitchFamily="34" charset="0"/>
+      <p:font typeface="JetBrains Mono Bold" panose="020B0604020202020204" charset="0"/>
       <p:regular r:id="rId20"/>
     </p:embeddedFont>
     <p:embeddedFont>
-      <p:font typeface="Helios Italics" panose="020B0503020202090204" pitchFamily="34" charset="0"/>
+      <p:font typeface="Open Sans" panose="020B0606030504020204" pitchFamily="34" charset="0"/>
       <p:regular r:id="rId21"/>
-    </p:embeddedFont>
-    <p:embeddedFont>
-      <p:font typeface="Inter Bold" panose="02000503000000020004" pitchFamily="2" charset="0"/>
-      <p:regular r:id="rId22"/>
-    </p:embeddedFont>
-    <p:embeddedFont>
-      <p:font typeface="JetBrains Mono Bold" panose="02010809030102050004" pitchFamily="49" charset="0"/>
-      <p:regular r:id="rId23"/>
-    </p:embeddedFont>
-    <p:embeddedFont>
-      <p:font typeface="Open Sans" panose="020B0606030504020204" pitchFamily="34" charset="0"/>
-      <p:regular r:id="rId24"/>
+      <p:bold r:id="rId22"/>
+      <p:italic r:id="rId23"/>
+      <p:boldItalic r:id="rId24"/>
     </p:embeddedFont>
   </p:embeddedFontLst>
   <p:defaultTextStyle>
@@ -255,7 +252,7 @@
           <a:p>
             <a:fld id="{0442F01A-7533-4E44-9AF0-173FC65F86D3}" type="datetimeFigureOut">
               <a:rPr lang="en-US" smtClean="0"/>
-              <a:t>5/28/26</a:t>
+              <a:t>5/28/2026</a:t>
             </a:fld>
             <a:endParaRPr lang="en-US"/>
           </a:p>
@@ -588,7 +585,7 @@
           <a:p>
             <a:fld id="{0CCC5558-CB8A-4F6C-9531-FFDE67C25D14}" type="slidenum">
               <a:rPr lang="en-US" smtClean="0"/>
-              <a:t>8</a:t>
+              <a:t>9</a:t>
             </a:fld>
             <a:endParaRPr lang="en-US"/>
           </a:p>
@@ -787,7 +784,7 @@
             <a:fld id="{1D8BD707-D9CF-40AE-B4C6-C98DA3205C09}" type="datetimeFigureOut">
               <a:rPr lang="en-US" smtClean="0"/>
               <a:pPr/>
-              <a:t>5/28/26</a:t>
+              <a:t>5/28/2026</a:t>
             </a:fld>
             <a:endParaRPr lang="en-US"/>
           </a:p>
@@ -952,7 +949,7 @@
             <a:fld id="{1D8BD707-D9CF-40AE-B4C6-C98DA3205C09}" type="datetimeFigureOut">
               <a:rPr lang="en-US" smtClean="0"/>
               <a:pPr/>
-              <a:t>5/28/26</a:t>
+              <a:t>5/28/2026</a:t>
             </a:fld>
             <a:endParaRPr lang="en-US"/>
           </a:p>
@@ -1127,7 +1124,7 @@
             <a:fld id="{1D8BD707-D9CF-40AE-B4C6-C98DA3205C09}" type="datetimeFigureOut">
               <a:rPr lang="en-US" smtClean="0"/>
               <a:pPr/>
-              <a:t>5/28/26</a:t>
+              <a:t>5/28/2026</a:t>
             </a:fld>
             <a:endParaRPr lang="en-US"/>
           </a:p>
@@ -1292,7 +1289,7 @@
             <a:fld id="{1D8BD707-D9CF-40AE-B4C6-C98DA3205C09}" type="datetimeFigureOut">
               <a:rPr lang="en-US" smtClean="0"/>
               <a:pPr/>
-              <a:t>5/28/26</a:t>
+              <a:t>5/28/2026</a:t>
             </a:fld>
             <a:endParaRPr lang="en-US"/>
           </a:p>
@@ -1534,7 +1531,7 @@
             <a:fld id="{1D8BD707-D9CF-40AE-B4C6-C98DA3205C09}" type="datetimeFigureOut">
               <a:rPr lang="en-US" smtClean="0"/>
               <a:pPr/>
-              <a:t>5/28/26</a:t>
+              <a:t>5/28/2026</a:t>
             </a:fld>
             <a:endParaRPr lang="en-US"/>
           </a:p>
@@ -1816,7 +1813,7 @@
             <a:fld id="{1D8BD707-D9CF-40AE-B4C6-C98DA3205C09}" type="datetimeFigureOut">
               <a:rPr lang="en-US" smtClean="0"/>
               <a:pPr/>
-              <a:t>5/28/26</a:t>
+              <a:t>5/28/2026</a:t>
             </a:fld>
             <a:endParaRPr lang="en-US"/>
           </a:p>
@@ -2232,7 +2229,7 @@
             <a:fld id="{1D8BD707-D9CF-40AE-B4C6-C98DA3205C09}" type="datetimeFigureOut">
               <a:rPr lang="en-US" smtClean="0"/>
               <a:pPr/>
-              <a:t>5/28/26</a:t>
+              <a:t>5/28/2026</a:t>
             </a:fld>
             <a:endParaRPr lang="en-US"/>
           </a:p>
@@ -2346,7 +2343,7 @@
             <a:fld id="{1D8BD707-D9CF-40AE-B4C6-C98DA3205C09}" type="datetimeFigureOut">
               <a:rPr lang="en-US" smtClean="0"/>
               <a:pPr/>
-              <a:t>5/28/26</a:t>
+              <a:t>5/28/2026</a:t>
             </a:fld>
             <a:endParaRPr lang="en-US"/>
           </a:p>
@@ -2438,7 +2435,7 @@
             <a:fld id="{1D8BD707-D9CF-40AE-B4C6-C98DA3205C09}" type="datetimeFigureOut">
               <a:rPr lang="en-US" smtClean="0"/>
               <a:pPr/>
-              <a:t>5/28/26</a:t>
+              <a:t>5/28/2026</a:t>
             </a:fld>
             <a:endParaRPr lang="en-US"/>
           </a:p>
@@ -2710,7 +2707,7 @@
             <a:fld id="{1D8BD707-D9CF-40AE-B4C6-C98DA3205C09}" type="datetimeFigureOut">
               <a:rPr lang="en-US" smtClean="0"/>
               <a:pPr/>
-              <a:t>5/28/26</a:t>
+              <a:t>5/28/2026</a:t>
             </a:fld>
             <a:endParaRPr lang="en-US"/>
           </a:p>
@@ -2959,7 +2956,7 @@
             <a:fld id="{1D8BD707-D9CF-40AE-B4C6-C98DA3205C09}" type="datetimeFigureOut">
               <a:rPr lang="en-US" smtClean="0"/>
               <a:pPr/>
-              <a:t>5/28/26</a:t>
+              <a:t>5/28/2026</a:t>
             </a:fld>
             <a:endParaRPr lang="en-US"/>
           </a:p>
@@ -3167,7 +3164,7 @@
             <a:fld id="{1D8BD707-D9CF-40AE-B4C6-C98DA3205C09}" type="datetimeFigureOut">
               <a:rPr lang="en-US" smtClean="0"/>
               <a:pPr/>
-              <a:t>5/28/26</a:t>
+              <a:t>5/28/2026</a:t>
             </a:fld>
             <a:endParaRPr lang="en-US"/>
           </a:p>
@@ -3610,6 +3607,1491 @@
 <file path=ppt/slides/slide10.xml><?xml version="1.0" encoding="utf-8"?>
 <p:sld xmlns:a="http://schemas.openxmlformats.org/drawingml/2006/main" xmlns:r="http://schemas.openxmlformats.org/officeDocument/2006/relationships" xmlns:p="http://schemas.openxmlformats.org/presentationml/2006/main">
   <p:cSld>
+    <p:spTree>
+      <p:nvGrpSpPr>
+        <p:cNvPr id="1" name=""/>
+        <p:cNvGrpSpPr/>
+        <p:nvPr/>
+      </p:nvGrpSpPr>
+      <p:grpSpPr>
+        <a:xfrm>
+          <a:off x="0" y="0"/>
+          <a:ext cx="0" cy="0"/>
+          <a:chOff x="0" y="0"/>
+          <a:chExt cx="0" cy="0"/>
+        </a:xfrm>
+      </p:grpSpPr>
+      <p:grpSp>
+        <p:nvGrpSpPr>
+          <p:cNvPr id="2" name="Group 2"/>
+          <p:cNvGrpSpPr/>
+          <p:nvPr/>
+        </p:nvGrpSpPr>
+        <p:grpSpPr>
+          <a:xfrm rot="5400000">
+            <a:off x="8745955" y="-11573203"/>
+            <a:ext cx="1419301" cy="23086583"/>
+            <a:chOff x="0" y="0"/>
+            <a:chExt cx="528671" cy="8599447"/>
+          </a:xfrm>
+        </p:grpSpPr>
+        <p:sp>
+          <p:nvSpPr>
+            <p:cNvPr id="3" name="Freeform 3"/>
+            <p:cNvSpPr/>
+            <p:nvPr/>
+          </p:nvSpPr>
+          <p:spPr>
+            <a:xfrm>
+              <a:off x="0" y="0"/>
+              <a:ext cx="528671" cy="8599446"/>
+            </a:xfrm>
+            <a:custGeom>
+              <a:avLst/>
+              <a:gdLst/>
+              <a:ahLst/>
+              <a:cxnLst/>
+              <a:rect l="l" t="t" r="r" b="b"/>
+              <a:pathLst>
+                <a:path w="528671" h="8599446">
+                  <a:moveTo>
+                    <a:pt x="0" y="0"/>
+                  </a:moveTo>
+                  <a:lnTo>
+                    <a:pt x="528671" y="0"/>
+                  </a:lnTo>
+                  <a:lnTo>
+                    <a:pt x="528671" y="8599446"/>
+                  </a:lnTo>
+                  <a:lnTo>
+                    <a:pt x="0" y="8599446"/>
+                  </a:lnTo>
+                  <a:close/>
+                </a:path>
+              </a:pathLst>
+            </a:custGeom>
+            <a:solidFill>
+              <a:srgbClr val="262262"/>
+            </a:solidFill>
+          </p:spPr>
+          <p:txBody>
+            <a:bodyPr/>
+            <a:lstStyle/>
+            <a:p>
+              <a:endParaRPr lang="es-MX"/>
+            </a:p>
+          </p:txBody>
+        </p:sp>
+        <p:sp>
+          <p:nvSpPr>
+            <p:cNvPr id="4" name="TextBox 4"/>
+            <p:cNvSpPr txBox="1"/>
+            <p:nvPr/>
+          </p:nvSpPr>
+          <p:spPr>
+            <a:xfrm>
+              <a:off x="0" y="-28575"/>
+              <a:ext cx="528671" cy="8628022"/>
+            </a:xfrm>
+            <a:prstGeom prst="rect">
+              <a:avLst/>
+            </a:prstGeom>
+          </p:spPr>
+          <p:txBody>
+            <a:bodyPr lIns="48876" tIns="48876" rIns="48876" bIns="48876" rtlCol="0" anchor="ctr"/>
+            <a:lstStyle/>
+            <a:p>
+              <a:pPr algn="ctr">
+                <a:lnSpc>
+                  <a:spcPts val="2344"/>
+                </a:lnSpc>
+              </a:pPr>
+              <a:endParaRPr/>
+            </a:p>
+          </p:txBody>
+        </p:sp>
+      </p:grpSp>
+      <p:grpSp>
+        <p:nvGrpSpPr>
+          <p:cNvPr id="5" name="Group 5"/>
+          <p:cNvGrpSpPr/>
+          <p:nvPr/>
+        </p:nvGrpSpPr>
+        <p:grpSpPr>
+          <a:xfrm>
+            <a:off x="6593815" y="2585693"/>
+            <a:ext cx="5389667" cy="6871045"/>
+            <a:chOff x="0" y="0"/>
+            <a:chExt cx="1419501" cy="1809658"/>
+          </a:xfrm>
+        </p:grpSpPr>
+        <p:sp>
+          <p:nvSpPr>
+            <p:cNvPr id="6" name="Freeform 6"/>
+            <p:cNvSpPr/>
+            <p:nvPr/>
+          </p:nvSpPr>
+          <p:spPr>
+            <a:xfrm>
+              <a:off x="0" y="0"/>
+              <a:ext cx="1419501" cy="1809658"/>
+            </a:xfrm>
+            <a:custGeom>
+              <a:avLst/>
+              <a:gdLst/>
+              <a:ahLst/>
+              <a:cxnLst/>
+              <a:rect l="l" t="t" r="r" b="b"/>
+              <a:pathLst>
+                <a:path w="1419501" h="1809658">
+                  <a:moveTo>
+                    <a:pt x="0" y="0"/>
+                  </a:moveTo>
+                  <a:lnTo>
+                    <a:pt x="1419501" y="0"/>
+                  </a:lnTo>
+                  <a:lnTo>
+                    <a:pt x="1419501" y="1809658"/>
+                  </a:lnTo>
+                  <a:lnTo>
+                    <a:pt x="0" y="1809658"/>
+                  </a:lnTo>
+                  <a:close/>
+                </a:path>
+              </a:pathLst>
+            </a:custGeom>
+            <a:solidFill>
+              <a:srgbClr val="000000"/>
+            </a:solidFill>
+          </p:spPr>
+          <p:txBody>
+            <a:bodyPr/>
+            <a:lstStyle/>
+            <a:p>
+              <a:endParaRPr lang="es-MX"/>
+            </a:p>
+          </p:txBody>
+        </p:sp>
+        <p:sp>
+          <p:nvSpPr>
+            <p:cNvPr id="7" name="TextBox 7"/>
+            <p:cNvSpPr txBox="1"/>
+            <p:nvPr/>
+          </p:nvSpPr>
+          <p:spPr>
+            <a:xfrm>
+              <a:off x="0" y="-28575"/>
+              <a:ext cx="1419501" cy="1838233"/>
+            </a:xfrm>
+            <a:prstGeom prst="rect">
+              <a:avLst/>
+            </a:prstGeom>
+          </p:spPr>
+          <p:txBody>
+            <a:bodyPr lIns="50800" tIns="50800" rIns="50800" bIns="50800" rtlCol="0" anchor="ctr"/>
+            <a:lstStyle/>
+            <a:p>
+              <a:pPr algn="ctr">
+                <a:lnSpc>
+                  <a:spcPts val="2344"/>
+                </a:lnSpc>
+              </a:pPr>
+              <a:endParaRPr/>
+            </a:p>
+          </p:txBody>
+        </p:sp>
+      </p:grpSp>
+      <p:grpSp>
+        <p:nvGrpSpPr>
+          <p:cNvPr id="8" name="Group 8"/>
+          <p:cNvGrpSpPr/>
+          <p:nvPr/>
+        </p:nvGrpSpPr>
+        <p:grpSpPr>
+          <a:xfrm>
+            <a:off x="6368533" y="2426326"/>
+            <a:ext cx="5459435" cy="6882349"/>
+            <a:chOff x="0" y="0"/>
+            <a:chExt cx="1386289" cy="1747603"/>
+          </a:xfrm>
+        </p:grpSpPr>
+        <p:sp>
+          <p:nvSpPr>
+            <p:cNvPr id="9" name="Freeform 9"/>
+            <p:cNvSpPr/>
+            <p:nvPr/>
+          </p:nvSpPr>
+          <p:spPr>
+            <a:xfrm>
+              <a:off x="0" y="0"/>
+              <a:ext cx="1386289" cy="1747603"/>
+            </a:xfrm>
+            <a:custGeom>
+              <a:avLst/>
+              <a:gdLst/>
+              <a:ahLst/>
+              <a:cxnLst/>
+              <a:rect l="l" t="t" r="r" b="b"/>
+              <a:pathLst>
+                <a:path w="1386289" h="1747603">
+                  <a:moveTo>
+                    <a:pt x="0" y="0"/>
+                  </a:moveTo>
+                  <a:lnTo>
+                    <a:pt x="1386289" y="0"/>
+                  </a:lnTo>
+                  <a:lnTo>
+                    <a:pt x="1386289" y="1747603"/>
+                  </a:lnTo>
+                  <a:lnTo>
+                    <a:pt x="0" y="1747603"/>
+                  </a:lnTo>
+                  <a:close/>
+                </a:path>
+              </a:pathLst>
+            </a:custGeom>
+            <a:solidFill>
+              <a:srgbClr val="00C2FF"/>
+            </a:solidFill>
+            <a:ln w="38100" cap="sq">
+              <a:solidFill>
+                <a:srgbClr val="000000"/>
+              </a:solidFill>
+              <a:prstDash val="solid"/>
+              <a:miter/>
+            </a:ln>
+          </p:spPr>
+          <p:txBody>
+            <a:bodyPr/>
+            <a:lstStyle/>
+            <a:p>
+              <a:endParaRPr lang="es-MX"/>
+            </a:p>
+          </p:txBody>
+        </p:sp>
+        <p:sp>
+          <p:nvSpPr>
+            <p:cNvPr id="10" name="TextBox 10"/>
+            <p:cNvSpPr txBox="1"/>
+            <p:nvPr/>
+          </p:nvSpPr>
+          <p:spPr>
+            <a:xfrm>
+              <a:off x="0" y="-28575"/>
+              <a:ext cx="1386289" cy="1776178"/>
+            </a:xfrm>
+            <a:prstGeom prst="rect">
+              <a:avLst/>
+            </a:prstGeom>
+          </p:spPr>
+          <p:txBody>
+            <a:bodyPr lIns="50800" tIns="50800" rIns="50800" bIns="50800" rtlCol="0" anchor="ctr"/>
+            <a:lstStyle/>
+            <a:p>
+              <a:pPr algn="ctr">
+                <a:lnSpc>
+                  <a:spcPts val="2344"/>
+                </a:lnSpc>
+              </a:pPr>
+              <a:endParaRPr/>
+            </a:p>
+          </p:txBody>
+        </p:sp>
+      </p:grpSp>
+      <p:sp>
+        <p:nvSpPr>
+          <p:cNvPr id="11" name="AutoShape 11"/>
+          <p:cNvSpPr/>
+          <p:nvPr/>
+        </p:nvSpPr>
+        <p:spPr>
+          <a:xfrm>
+            <a:off x="6748776" y="5074418"/>
+            <a:ext cx="4698950" cy="0"/>
+          </a:xfrm>
+          <a:prstGeom prst="line">
+            <a:avLst/>
+          </a:prstGeom>
+          <a:ln w="66675" cap="flat">
+            <a:solidFill>
+              <a:srgbClr val="000000"/>
+            </a:solidFill>
+            <a:prstDash val="solid"/>
+            <a:headEnd type="none" w="sm" len="sm"/>
+            <a:tailEnd type="none" w="sm" len="sm"/>
+          </a:ln>
+        </p:spPr>
+        <p:txBody>
+          <a:bodyPr/>
+          <a:lstStyle/>
+          <a:p>
+            <a:endParaRPr lang="es-MX"/>
+          </a:p>
+        </p:txBody>
+      </p:sp>
+      <p:grpSp>
+        <p:nvGrpSpPr>
+          <p:cNvPr id="12" name="Group 12"/>
+          <p:cNvGrpSpPr/>
+          <p:nvPr/>
+        </p:nvGrpSpPr>
+        <p:grpSpPr>
+          <a:xfrm>
+            <a:off x="6762737" y="2762674"/>
+            <a:ext cx="4671027" cy="513781"/>
+            <a:chOff x="0" y="0"/>
+            <a:chExt cx="1167218" cy="128386"/>
+          </a:xfrm>
+        </p:grpSpPr>
+        <p:sp>
+          <p:nvSpPr>
+            <p:cNvPr id="13" name="Freeform 13"/>
+            <p:cNvSpPr/>
+            <p:nvPr/>
+          </p:nvSpPr>
+          <p:spPr>
+            <a:xfrm>
+              <a:off x="0" y="0"/>
+              <a:ext cx="1167218" cy="128386"/>
+            </a:xfrm>
+            <a:custGeom>
+              <a:avLst/>
+              <a:gdLst/>
+              <a:ahLst/>
+              <a:cxnLst/>
+              <a:rect l="l" t="t" r="r" b="b"/>
+              <a:pathLst>
+                <a:path w="1167218" h="128386">
+                  <a:moveTo>
+                    <a:pt x="0" y="0"/>
+                  </a:moveTo>
+                  <a:lnTo>
+                    <a:pt x="1167218" y="0"/>
+                  </a:lnTo>
+                  <a:lnTo>
+                    <a:pt x="1167218" y="128386"/>
+                  </a:lnTo>
+                  <a:lnTo>
+                    <a:pt x="0" y="128386"/>
+                  </a:lnTo>
+                  <a:close/>
+                </a:path>
+              </a:pathLst>
+            </a:custGeom>
+            <a:solidFill>
+              <a:srgbClr val="FF2929"/>
+            </a:solidFill>
+            <a:ln w="28575" cap="sq">
+              <a:solidFill>
+                <a:srgbClr val="000000"/>
+              </a:solidFill>
+              <a:prstDash val="solid"/>
+              <a:miter/>
+            </a:ln>
+          </p:spPr>
+          <p:txBody>
+            <a:bodyPr/>
+            <a:lstStyle/>
+            <a:p>
+              <a:endParaRPr lang="es-MX"/>
+            </a:p>
+          </p:txBody>
+        </p:sp>
+        <p:sp>
+          <p:nvSpPr>
+            <p:cNvPr id="14" name="TextBox 14"/>
+            <p:cNvSpPr txBox="1"/>
+            <p:nvPr/>
+          </p:nvSpPr>
+          <p:spPr>
+            <a:xfrm>
+              <a:off x="0" y="-28575"/>
+              <a:ext cx="1167218" cy="156961"/>
+            </a:xfrm>
+            <a:prstGeom prst="rect">
+              <a:avLst/>
+            </a:prstGeom>
+          </p:spPr>
+          <p:txBody>
+            <a:bodyPr lIns="50800" tIns="50800" rIns="50800" bIns="50800" rtlCol="0" anchor="ctr"/>
+            <a:lstStyle/>
+            <a:p>
+              <a:pPr algn="r">
+                <a:lnSpc>
+                  <a:spcPts val="2659"/>
+                </a:lnSpc>
+              </a:pPr>
+              <a:endParaRPr/>
+            </a:p>
+          </p:txBody>
+        </p:sp>
+      </p:grpSp>
+      <p:grpSp>
+        <p:nvGrpSpPr>
+          <p:cNvPr id="15" name="Group 15"/>
+          <p:cNvGrpSpPr/>
+          <p:nvPr/>
+        </p:nvGrpSpPr>
+        <p:grpSpPr>
+          <a:xfrm>
+            <a:off x="629512" y="2958135"/>
+            <a:ext cx="5389667" cy="6246269"/>
+            <a:chOff x="0" y="0"/>
+            <a:chExt cx="1419501" cy="1645108"/>
+          </a:xfrm>
+        </p:grpSpPr>
+        <p:sp>
+          <p:nvSpPr>
+            <p:cNvPr id="16" name="Freeform 16"/>
+            <p:cNvSpPr/>
+            <p:nvPr/>
+          </p:nvSpPr>
+          <p:spPr>
+            <a:xfrm>
+              <a:off x="0" y="0"/>
+              <a:ext cx="1419501" cy="1645108"/>
+            </a:xfrm>
+            <a:custGeom>
+              <a:avLst/>
+              <a:gdLst/>
+              <a:ahLst/>
+              <a:cxnLst/>
+              <a:rect l="l" t="t" r="r" b="b"/>
+              <a:pathLst>
+                <a:path w="1419501" h="1645108">
+                  <a:moveTo>
+                    <a:pt x="0" y="0"/>
+                  </a:moveTo>
+                  <a:lnTo>
+                    <a:pt x="1419501" y="0"/>
+                  </a:lnTo>
+                  <a:lnTo>
+                    <a:pt x="1419501" y="1645108"/>
+                  </a:lnTo>
+                  <a:lnTo>
+                    <a:pt x="0" y="1645108"/>
+                  </a:lnTo>
+                  <a:close/>
+                </a:path>
+              </a:pathLst>
+            </a:custGeom>
+            <a:solidFill>
+              <a:srgbClr val="000000"/>
+            </a:solidFill>
+          </p:spPr>
+          <p:txBody>
+            <a:bodyPr/>
+            <a:lstStyle/>
+            <a:p>
+              <a:endParaRPr lang="es-MX"/>
+            </a:p>
+          </p:txBody>
+        </p:sp>
+        <p:sp>
+          <p:nvSpPr>
+            <p:cNvPr id="17" name="TextBox 17"/>
+            <p:cNvSpPr txBox="1"/>
+            <p:nvPr/>
+          </p:nvSpPr>
+          <p:spPr>
+            <a:xfrm>
+              <a:off x="0" y="-28575"/>
+              <a:ext cx="1419501" cy="1673683"/>
+            </a:xfrm>
+            <a:prstGeom prst="rect">
+              <a:avLst/>
+            </a:prstGeom>
+          </p:spPr>
+          <p:txBody>
+            <a:bodyPr lIns="50800" tIns="50800" rIns="50800" bIns="50800" rtlCol="0" anchor="ctr"/>
+            <a:lstStyle/>
+            <a:p>
+              <a:pPr algn="ctr">
+                <a:lnSpc>
+                  <a:spcPts val="2344"/>
+                </a:lnSpc>
+              </a:pPr>
+              <a:endParaRPr/>
+            </a:p>
+          </p:txBody>
+        </p:sp>
+      </p:grpSp>
+      <p:grpSp>
+        <p:nvGrpSpPr>
+          <p:cNvPr id="18" name="Group 18"/>
+          <p:cNvGrpSpPr/>
+          <p:nvPr/>
+        </p:nvGrpSpPr>
+        <p:grpSpPr>
+          <a:xfrm>
+            <a:off x="404231" y="2813259"/>
+            <a:ext cx="5459435" cy="6256546"/>
+            <a:chOff x="0" y="0"/>
+            <a:chExt cx="1386289" cy="1588696"/>
+          </a:xfrm>
+        </p:grpSpPr>
+        <p:sp>
+          <p:nvSpPr>
+            <p:cNvPr id="19" name="Freeform 19"/>
+            <p:cNvSpPr/>
+            <p:nvPr/>
+          </p:nvSpPr>
+          <p:spPr>
+            <a:xfrm>
+              <a:off x="0" y="0"/>
+              <a:ext cx="1386289" cy="1588696"/>
+            </a:xfrm>
+            <a:custGeom>
+              <a:avLst/>
+              <a:gdLst/>
+              <a:ahLst/>
+              <a:cxnLst/>
+              <a:rect l="l" t="t" r="r" b="b"/>
+              <a:pathLst>
+                <a:path w="1386289" h="1588696">
+                  <a:moveTo>
+                    <a:pt x="0" y="0"/>
+                  </a:moveTo>
+                  <a:lnTo>
+                    <a:pt x="1386289" y="0"/>
+                  </a:lnTo>
+                  <a:lnTo>
+                    <a:pt x="1386289" y="1588696"/>
+                  </a:lnTo>
+                  <a:lnTo>
+                    <a:pt x="0" y="1588696"/>
+                  </a:lnTo>
+                  <a:close/>
+                </a:path>
+              </a:pathLst>
+            </a:custGeom>
+            <a:solidFill>
+              <a:srgbClr val="FFFFFF"/>
+            </a:solidFill>
+            <a:ln w="38100" cap="sq">
+              <a:solidFill>
+                <a:srgbClr val="000000"/>
+              </a:solidFill>
+              <a:prstDash val="solid"/>
+              <a:miter/>
+            </a:ln>
+          </p:spPr>
+          <p:txBody>
+            <a:bodyPr/>
+            <a:lstStyle/>
+            <a:p>
+              <a:endParaRPr lang="es-MX"/>
+            </a:p>
+          </p:txBody>
+        </p:sp>
+        <p:sp>
+          <p:nvSpPr>
+            <p:cNvPr id="20" name="TextBox 20"/>
+            <p:cNvSpPr txBox="1"/>
+            <p:nvPr/>
+          </p:nvSpPr>
+          <p:spPr>
+            <a:xfrm>
+              <a:off x="0" y="-28575"/>
+              <a:ext cx="1386289" cy="1617271"/>
+            </a:xfrm>
+            <a:prstGeom prst="rect">
+              <a:avLst/>
+            </a:prstGeom>
+          </p:spPr>
+          <p:txBody>
+            <a:bodyPr lIns="50800" tIns="50800" rIns="50800" bIns="50800" rtlCol="0" anchor="ctr"/>
+            <a:lstStyle/>
+            <a:p>
+              <a:pPr algn="ctr">
+                <a:lnSpc>
+                  <a:spcPts val="2344"/>
+                </a:lnSpc>
+              </a:pPr>
+              <a:endParaRPr/>
+            </a:p>
+          </p:txBody>
+        </p:sp>
+      </p:grpSp>
+      <p:sp>
+        <p:nvSpPr>
+          <p:cNvPr id="21" name="AutoShape 21"/>
+          <p:cNvSpPr/>
+          <p:nvPr/>
+        </p:nvSpPr>
+        <p:spPr>
+          <a:xfrm>
+            <a:off x="784473" y="4740265"/>
+            <a:ext cx="4698950" cy="0"/>
+          </a:xfrm>
+          <a:prstGeom prst="line">
+            <a:avLst/>
+          </a:prstGeom>
+          <a:ln w="66675" cap="flat">
+            <a:solidFill>
+              <a:srgbClr val="000000"/>
+            </a:solidFill>
+            <a:prstDash val="solid"/>
+            <a:headEnd type="none" w="sm" len="sm"/>
+            <a:tailEnd type="none" w="sm" len="sm"/>
+          </a:ln>
+        </p:spPr>
+        <p:txBody>
+          <a:bodyPr/>
+          <a:lstStyle/>
+          <a:p>
+            <a:endParaRPr lang="es-MX"/>
+          </a:p>
+        </p:txBody>
+      </p:sp>
+      <p:grpSp>
+        <p:nvGrpSpPr>
+          <p:cNvPr id="22" name="Group 22"/>
+          <p:cNvGrpSpPr/>
+          <p:nvPr/>
+        </p:nvGrpSpPr>
+        <p:grpSpPr>
+          <a:xfrm>
+            <a:off x="12561189" y="3030574"/>
+            <a:ext cx="5389667" cy="6246269"/>
+            <a:chOff x="0" y="0"/>
+            <a:chExt cx="1419501" cy="1645108"/>
+          </a:xfrm>
+        </p:grpSpPr>
+        <p:sp>
+          <p:nvSpPr>
+            <p:cNvPr id="23" name="Freeform 23"/>
+            <p:cNvSpPr/>
+            <p:nvPr/>
+          </p:nvSpPr>
+          <p:spPr>
+            <a:xfrm>
+              <a:off x="0" y="0"/>
+              <a:ext cx="1419501" cy="1645108"/>
+            </a:xfrm>
+            <a:custGeom>
+              <a:avLst/>
+              <a:gdLst/>
+              <a:ahLst/>
+              <a:cxnLst/>
+              <a:rect l="l" t="t" r="r" b="b"/>
+              <a:pathLst>
+                <a:path w="1419501" h="1645108">
+                  <a:moveTo>
+                    <a:pt x="0" y="0"/>
+                  </a:moveTo>
+                  <a:lnTo>
+                    <a:pt x="1419501" y="0"/>
+                  </a:lnTo>
+                  <a:lnTo>
+                    <a:pt x="1419501" y="1645108"/>
+                  </a:lnTo>
+                  <a:lnTo>
+                    <a:pt x="0" y="1645108"/>
+                  </a:lnTo>
+                  <a:close/>
+                </a:path>
+              </a:pathLst>
+            </a:custGeom>
+            <a:solidFill>
+              <a:srgbClr val="000000"/>
+            </a:solidFill>
+          </p:spPr>
+          <p:txBody>
+            <a:bodyPr/>
+            <a:lstStyle/>
+            <a:p>
+              <a:endParaRPr lang="es-MX"/>
+            </a:p>
+          </p:txBody>
+        </p:sp>
+        <p:sp>
+          <p:nvSpPr>
+            <p:cNvPr id="24" name="TextBox 24"/>
+            <p:cNvSpPr txBox="1"/>
+            <p:nvPr/>
+          </p:nvSpPr>
+          <p:spPr>
+            <a:xfrm>
+              <a:off x="0" y="-28575"/>
+              <a:ext cx="1419501" cy="1673683"/>
+            </a:xfrm>
+            <a:prstGeom prst="rect">
+              <a:avLst/>
+            </a:prstGeom>
+          </p:spPr>
+          <p:txBody>
+            <a:bodyPr lIns="50800" tIns="50800" rIns="50800" bIns="50800" rtlCol="0" anchor="ctr"/>
+            <a:lstStyle/>
+            <a:p>
+              <a:pPr algn="ctr">
+                <a:lnSpc>
+                  <a:spcPts val="2344"/>
+                </a:lnSpc>
+              </a:pPr>
+              <a:endParaRPr/>
+            </a:p>
+          </p:txBody>
+        </p:sp>
+      </p:grpSp>
+      <p:grpSp>
+        <p:nvGrpSpPr>
+          <p:cNvPr id="25" name="Group 25"/>
+          <p:cNvGrpSpPr/>
+          <p:nvPr/>
+        </p:nvGrpSpPr>
+        <p:grpSpPr>
+          <a:xfrm>
+            <a:off x="12335907" y="2885697"/>
+            <a:ext cx="5459435" cy="6256546"/>
+            <a:chOff x="0" y="0"/>
+            <a:chExt cx="1386289" cy="1588696"/>
+          </a:xfrm>
+        </p:grpSpPr>
+        <p:sp>
+          <p:nvSpPr>
+            <p:cNvPr id="26" name="Freeform 26"/>
+            <p:cNvSpPr/>
+            <p:nvPr/>
+          </p:nvSpPr>
+          <p:spPr>
+            <a:xfrm>
+              <a:off x="0" y="0"/>
+              <a:ext cx="1386289" cy="1588696"/>
+            </a:xfrm>
+            <a:custGeom>
+              <a:avLst/>
+              <a:gdLst/>
+              <a:ahLst/>
+              <a:cxnLst/>
+              <a:rect l="l" t="t" r="r" b="b"/>
+              <a:pathLst>
+                <a:path w="1386289" h="1588696">
+                  <a:moveTo>
+                    <a:pt x="0" y="0"/>
+                  </a:moveTo>
+                  <a:lnTo>
+                    <a:pt x="1386289" y="0"/>
+                  </a:lnTo>
+                  <a:lnTo>
+                    <a:pt x="1386289" y="1588696"/>
+                  </a:lnTo>
+                  <a:lnTo>
+                    <a:pt x="0" y="1588696"/>
+                  </a:lnTo>
+                  <a:close/>
+                </a:path>
+              </a:pathLst>
+            </a:custGeom>
+            <a:solidFill>
+              <a:srgbClr val="FFFFFF"/>
+            </a:solidFill>
+            <a:ln w="38100" cap="sq">
+              <a:solidFill>
+                <a:srgbClr val="000000"/>
+              </a:solidFill>
+              <a:prstDash val="solid"/>
+              <a:miter/>
+            </a:ln>
+          </p:spPr>
+          <p:txBody>
+            <a:bodyPr/>
+            <a:lstStyle/>
+            <a:p>
+              <a:endParaRPr lang="es-MX"/>
+            </a:p>
+          </p:txBody>
+        </p:sp>
+        <p:sp>
+          <p:nvSpPr>
+            <p:cNvPr id="27" name="TextBox 27"/>
+            <p:cNvSpPr txBox="1"/>
+            <p:nvPr/>
+          </p:nvSpPr>
+          <p:spPr>
+            <a:xfrm>
+              <a:off x="0" y="-28575"/>
+              <a:ext cx="1386289" cy="1617271"/>
+            </a:xfrm>
+            <a:prstGeom prst="rect">
+              <a:avLst/>
+            </a:prstGeom>
+          </p:spPr>
+          <p:txBody>
+            <a:bodyPr lIns="50800" tIns="50800" rIns="50800" bIns="50800" rtlCol="0" anchor="ctr"/>
+            <a:lstStyle/>
+            <a:p>
+              <a:pPr algn="ctr">
+                <a:lnSpc>
+                  <a:spcPts val="2344"/>
+                </a:lnSpc>
+              </a:pPr>
+              <a:endParaRPr/>
+            </a:p>
+          </p:txBody>
+        </p:sp>
+      </p:grpSp>
+      <p:sp>
+        <p:nvSpPr>
+          <p:cNvPr id="28" name="AutoShape 28"/>
+          <p:cNvSpPr/>
+          <p:nvPr/>
+        </p:nvSpPr>
+        <p:spPr>
+          <a:xfrm>
+            <a:off x="12716150" y="4812703"/>
+            <a:ext cx="4698950" cy="0"/>
+          </a:xfrm>
+          <a:prstGeom prst="line">
+            <a:avLst/>
+          </a:prstGeom>
+          <a:ln w="66675" cap="flat">
+            <a:solidFill>
+              <a:srgbClr val="000000"/>
+            </a:solidFill>
+            <a:prstDash val="solid"/>
+            <a:headEnd type="none" w="sm" len="sm"/>
+            <a:tailEnd type="none" w="sm" len="sm"/>
+          </a:ln>
+        </p:spPr>
+        <p:txBody>
+          <a:bodyPr/>
+          <a:lstStyle/>
+          <a:p>
+            <a:endParaRPr lang="es-MX"/>
+          </a:p>
+        </p:txBody>
+      </p:sp>
+      <p:sp>
+        <p:nvSpPr>
+          <p:cNvPr id="29" name="TextBox 29"/>
+          <p:cNvSpPr txBox="1"/>
+          <p:nvPr/>
+        </p:nvSpPr>
+        <p:spPr>
+          <a:xfrm>
+            <a:off x="3133948" y="1015098"/>
+            <a:ext cx="12436066" cy="1066681"/>
+          </a:xfrm>
+          <a:prstGeom prst="rect">
+            <a:avLst/>
+          </a:prstGeom>
+        </p:spPr>
+        <p:txBody>
+          <a:bodyPr wrap="square" lIns="0" tIns="0" rIns="0" bIns="0" rtlCol="0" anchor="t">
+            <a:spAutoFit/>
+          </a:bodyPr>
+          <a:lstStyle/>
+          <a:p>
+            <a:pPr marL="0" lvl="1" indent="0" algn="ctr">
+              <a:lnSpc>
+                <a:spcPts val="8000"/>
+              </a:lnSpc>
+              <a:spcBef>
+                <a:spcPct val="0"/>
+              </a:spcBef>
+            </a:pPr>
+            <a:r>
+              <a:rPr lang="en-US" sz="8000" b="1" u="none" strike="noStrike" spc="416" dirty="0">
+                <a:solidFill>
+                  <a:srgbClr val="4263EB"/>
+                </a:solidFill>
+                <a:latin typeface="Inter Bold"/>
+                <a:ea typeface="Inter Bold"/>
+                <a:cs typeface="Inter Bold"/>
+                <a:sym typeface="Inter Bold"/>
+              </a:rPr>
+              <a:t>Subscription Plans</a:t>
+            </a:r>
+          </a:p>
+        </p:txBody>
+      </p:sp>
+      <p:sp>
+        <p:nvSpPr>
+          <p:cNvPr id="30" name="TextBox 30"/>
+          <p:cNvSpPr txBox="1"/>
+          <p:nvPr/>
+        </p:nvSpPr>
+        <p:spPr>
+          <a:xfrm>
+            <a:off x="6641440" y="5316167"/>
+            <a:ext cx="4607135" cy="3569284"/>
+          </a:xfrm>
+          <a:prstGeom prst="rect">
+            <a:avLst/>
+          </a:prstGeom>
+        </p:spPr>
+        <p:txBody>
+          <a:bodyPr lIns="0" tIns="0" rIns="0" bIns="0" rtlCol="0" anchor="t">
+            <a:spAutoFit/>
+          </a:bodyPr>
+          <a:lstStyle/>
+          <a:p>
+            <a:pPr marL="537442" lvl="1" indent="-268721" algn="just">
+              <a:lnSpc>
+                <a:spcPts val="4057"/>
+              </a:lnSpc>
+              <a:buFont typeface="Arial"/>
+              <a:buChar char="•"/>
+            </a:pPr>
+            <a:r>
+              <a:rPr lang="en-US" sz="2489" b="1">
+                <a:solidFill>
+                  <a:srgbClr val="000000"/>
+                </a:solidFill>
+                <a:latin typeface="Helios Bold"/>
+                <a:ea typeface="Helios Bold"/>
+                <a:cs typeface="Helios Bold"/>
+                <a:sym typeface="Helios Bold"/>
+              </a:rPr>
+              <a:t>Unlimited builds.</a:t>
+            </a:r>
+          </a:p>
+          <a:p>
+            <a:pPr marL="537442" lvl="1" indent="-268721" algn="just">
+              <a:lnSpc>
+                <a:spcPts val="4057"/>
+              </a:lnSpc>
+              <a:buFont typeface="Arial"/>
+              <a:buChar char="•"/>
+            </a:pPr>
+            <a:r>
+              <a:rPr lang="en-US" sz="2489">
+                <a:solidFill>
+                  <a:srgbClr val="000000"/>
+                </a:solidFill>
+                <a:latin typeface="Helios"/>
+                <a:ea typeface="Helios"/>
+                <a:cs typeface="Helios"/>
+                <a:sym typeface="Helios"/>
+              </a:rPr>
+              <a:t>Customizable web interface (image/video backgrounds).</a:t>
+            </a:r>
+          </a:p>
+          <a:p>
+            <a:pPr marL="537442" lvl="1" indent="-268721" algn="just">
+              <a:lnSpc>
+                <a:spcPts val="4057"/>
+              </a:lnSpc>
+              <a:buFont typeface="Arial"/>
+              <a:buChar char="•"/>
+            </a:pPr>
+            <a:r>
+              <a:rPr lang="en-US" sz="2489">
+                <a:solidFill>
+                  <a:srgbClr val="000000"/>
+                </a:solidFill>
+                <a:latin typeface="Helios"/>
+                <a:ea typeface="Helios"/>
+                <a:cs typeface="Helios"/>
+                <a:sym typeface="Helios"/>
+              </a:rPr>
+              <a:t>Full report downloads (.JSON, .ASM, and .out binaries).</a:t>
+            </a:r>
+          </a:p>
+          <a:p>
+            <a:pPr marL="537442" lvl="1" indent="-268721" algn="just">
+              <a:lnSpc>
+                <a:spcPts val="4057"/>
+              </a:lnSpc>
+              <a:buFont typeface="Arial"/>
+              <a:buChar char="•"/>
+            </a:pPr>
+            <a:r>
+              <a:rPr lang="en-US" sz="2489">
+                <a:solidFill>
+                  <a:srgbClr val="000000"/>
+                </a:solidFill>
+                <a:latin typeface="Helios"/>
+                <a:ea typeface="Helios"/>
+                <a:cs typeface="Helios"/>
+                <a:sym typeface="Helios"/>
+              </a:rPr>
+              <a:t>Priority technical support.</a:t>
+            </a:r>
+          </a:p>
+        </p:txBody>
+      </p:sp>
+      <p:sp>
+        <p:nvSpPr>
+          <p:cNvPr id="31" name="TextBox 31"/>
+          <p:cNvSpPr txBox="1"/>
+          <p:nvPr/>
+        </p:nvSpPr>
+        <p:spPr>
+          <a:xfrm>
+            <a:off x="6708115" y="3536131"/>
+            <a:ext cx="3695941" cy="660400"/>
+          </a:xfrm>
+          <a:prstGeom prst="rect">
+            <a:avLst/>
+          </a:prstGeom>
+        </p:spPr>
+        <p:txBody>
+          <a:bodyPr wrap="square" lIns="0" tIns="0" rIns="0" bIns="0" rtlCol="0" anchor="t">
+            <a:spAutoFit/>
+          </a:bodyPr>
+          <a:lstStyle/>
+          <a:p>
+            <a:pPr algn="ctr">
+              <a:lnSpc>
+                <a:spcPts val="5000"/>
+              </a:lnSpc>
+            </a:pPr>
+            <a:r>
+              <a:rPr lang="en-US" sz="5000" b="1" spc="260" dirty="0">
+                <a:solidFill>
+                  <a:srgbClr val="262262"/>
+                </a:solidFill>
+                <a:latin typeface="Inter Bold"/>
+                <a:ea typeface="Inter Bold"/>
+                <a:cs typeface="Inter Bold"/>
+                <a:sym typeface="Inter Bold"/>
+              </a:rPr>
+              <a:t>Pro-load</a:t>
+            </a:r>
+          </a:p>
+        </p:txBody>
+      </p:sp>
+      <p:sp>
+        <p:nvSpPr>
+          <p:cNvPr id="32" name="TextBox 32"/>
+          <p:cNvSpPr txBox="1"/>
+          <p:nvPr/>
+        </p:nvSpPr>
+        <p:spPr>
+          <a:xfrm>
+            <a:off x="6708114" y="4272731"/>
+            <a:ext cx="4607135" cy="530225"/>
+          </a:xfrm>
+          <a:prstGeom prst="rect">
+            <a:avLst/>
+          </a:prstGeom>
+        </p:spPr>
+        <p:txBody>
+          <a:bodyPr wrap="square" lIns="0" tIns="0" rIns="0" bIns="0" rtlCol="0" anchor="t">
+            <a:spAutoFit/>
+          </a:bodyPr>
+          <a:lstStyle/>
+          <a:p>
+            <a:pPr algn="ctr">
+              <a:lnSpc>
+                <a:spcPts val="3999"/>
+              </a:lnSpc>
+            </a:pPr>
+            <a:r>
+              <a:rPr lang="en-US" sz="3999" b="1" spc="207" dirty="0">
+                <a:solidFill>
+                  <a:srgbClr val="FFFFFF"/>
+                </a:solidFill>
+                <a:latin typeface="Inter Bold"/>
+                <a:ea typeface="Inter Bold"/>
+                <a:cs typeface="Inter Bold"/>
+                <a:sym typeface="Inter Bold"/>
+              </a:rPr>
+              <a:t>$15 USD/month</a:t>
+            </a:r>
+          </a:p>
+        </p:txBody>
+      </p:sp>
+      <p:sp>
+        <p:nvSpPr>
+          <p:cNvPr id="33" name="TextBox 33"/>
+          <p:cNvSpPr txBox="1"/>
+          <p:nvPr/>
+        </p:nvSpPr>
+        <p:spPr>
+          <a:xfrm>
+            <a:off x="6900302" y="2719337"/>
+            <a:ext cx="4395898" cy="486156"/>
+          </a:xfrm>
+          <a:prstGeom prst="rect">
+            <a:avLst/>
+          </a:prstGeom>
+        </p:spPr>
+        <p:txBody>
+          <a:bodyPr lIns="0" tIns="0" rIns="0" bIns="0" rtlCol="0" anchor="t">
+            <a:spAutoFit/>
+          </a:bodyPr>
+          <a:lstStyle/>
+          <a:p>
+            <a:pPr algn="ctr">
+              <a:lnSpc>
+                <a:spcPts val="3911"/>
+              </a:lnSpc>
+            </a:pPr>
+            <a:r>
+              <a:rPr lang="en-US" sz="2400" b="1">
+                <a:solidFill>
+                  <a:srgbClr val="FFFFFF"/>
+                </a:solidFill>
+                <a:latin typeface="Helios Bold"/>
+                <a:ea typeface="Helios Bold"/>
+                <a:cs typeface="Helios Bold"/>
+                <a:sym typeface="Helios Bold"/>
+              </a:rPr>
+              <a:t>OFFER</a:t>
+            </a:r>
+            <a:r>
+              <a:rPr lang="en-US" sz="2400" b="1" u="none" strike="noStrike">
+                <a:solidFill>
+                  <a:srgbClr val="FFFFFF"/>
+                </a:solidFill>
+                <a:latin typeface="Helios Bold"/>
+                <a:ea typeface="Helios Bold"/>
+                <a:cs typeface="Helios Bold"/>
+                <a:sym typeface="Helios Bold"/>
+              </a:rPr>
+              <a:t>: $5/month (3 months)</a:t>
+            </a:r>
+          </a:p>
+        </p:txBody>
+      </p:sp>
+      <p:sp>
+        <p:nvSpPr>
+          <p:cNvPr id="34" name="TextBox 34"/>
+          <p:cNvSpPr txBox="1"/>
+          <p:nvPr/>
+        </p:nvSpPr>
+        <p:spPr>
+          <a:xfrm>
+            <a:off x="708273" y="4986758"/>
+            <a:ext cx="4547424" cy="3564952"/>
+          </a:xfrm>
+          <a:prstGeom prst="rect">
+            <a:avLst/>
+          </a:prstGeom>
+        </p:spPr>
+        <p:txBody>
+          <a:bodyPr lIns="0" tIns="0" rIns="0" bIns="0" rtlCol="0" anchor="t">
+            <a:spAutoFit/>
+          </a:bodyPr>
+          <a:lstStyle/>
+          <a:p>
+            <a:pPr marL="537442" lvl="1" indent="-268721" algn="just">
+              <a:lnSpc>
+                <a:spcPts val="4057"/>
+              </a:lnSpc>
+              <a:buFont typeface="Arial"/>
+              <a:buChar char="•"/>
+            </a:pPr>
+            <a:r>
+              <a:rPr lang="en-US" sz="2489">
+                <a:solidFill>
+                  <a:srgbClr val="000000"/>
+                </a:solidFill>
+                <a:latin typeface="Helios"/>
+                <a:ea typeface="Helios"/>
+                <a:cs typeface="Helios"/>
+                <a:sym typeface="Helios"/>
+              </a:rPr>
+              <a:t>Full analysis (Lexical, Semantic, Visual SDT, Optimized Code, TAC, ASM).</a:t>
+            </a:r>
+          </a:p>
+          <a:p>
+            <a:pPr marL="537442" lvl="1" indent="-268721" algn="just">
+              <a:lnSpc>
+                <a:spcPts val="4057"/>
+              </a:lnSpc>
+              <a:buFont typeface="Arial"/>
+              <a:buChar char="•"/>
+            </a:pPr>
+            <a:r>
+              <a:rPr lang="en-US" sz="2489">
+                <a:solidFill>
+                  <a:srgbClr val="000000"/>
+                </a:solidFill>
+                <a:latin typeface="Helios"/>
+                <a:ea typeface="Helios"/>
+                <a:cs typeface="Helios"/>
+                <a:sym typeface="Helios"/>
+              </a:rPr>
+              <a:t>Standard interface (static).</a:t>
+            </a:r>
+          </a:p>
+          <a:p>
+            <a:pPr marL="537442" lvl="1" indent="-268721" algn="just">
+              <a:lnSpc>
+                <a:spcPts val="4057"/>
+              </a:lnSpc>
+              <a:buFont typeface="Arial"/>
+              <a:buChar char="•"/>
+            </a:pPr>
+            <a:r>
+              <a:rPr lang="en-US" sz="2489">
+                <a:solidFill>
+                  <a:srgbClr val="000000"/>
+                </a:solidFill>
+                <a:latin typeface="Helios"/>
+                <a:ea typeface="Helios"/>
+                <a:cs typeface="Helios"/>
+                <a:sym typeface="Helios"/>
+              </a:rPr>
+              <a:t>Limit of 5 to 10 compilations per day.</a:t>
+            </a:r>
+          </a:p>
+        </p:txBody>
+      </p:sp>
+      <p:sp>
+        <p:nvSpPr>
+          <p:cNvPr id="35" name="TextBox 35"/>
+          <p:cNvSpPr txBox="1"/>
+          <p:nvPr/>
+        </p:nvSpPr>
+        <p:spPr>
+          <a:xfrm>
+            <a:off x="846060" y="3201977"/>
+            <a:ext cx="3925729" cy="660400"/>
+          </a:xfrm>
+          <a:prstGeom prst="rect">
+            <a:avLst/>
+          </a:prstGeom>
+        </p:spPr>
+        <p:txBody>
+          <a:bodyPr wrap="square" lIns="0" tIns="0" rIns="0" bIns="0" rtlCol="0" anchor="t">
+            <a:spAutoFit/>
+          </a:bodyPr>
+          <a:lstStyle/>
+          <a:p>
+            <a:pPr algn="ctr">
+              <a:lnSpc>
+                <a:spcPts val="5000"/>
+              </a:lnSpc>
+            </a:pPr>
+            <a:r>
+              <a:rPr lang="en-US" sz="5000" b="1" spc="260" dirty="0">
+                <a:solidFill>
+                  <a:srgbClr val="262262"/>
+                </a:solidFill>
+                <a:latin typeface="Inter Bold"/>
+                <a:ea typeface="Inter Bold"/>
+                <a:cs typeface="Inter Bold"/>
+                <a:sym typeface="Inter Bold"/>
+              </a:rPr>
+              <a:t>Free-load</a:t>
+            </a:r>
+          </a:p>
+        </p:txBody>
+      </p:sp>
+      <p:sp>
+        <p:nvSpPr>
+          <p:cNvPr id="36" name="TextBox 36"/>
+          <p:cNvSpPr txBox="1"/>
+          <p:nvPr/>
+        </p:nvSpPr>
+        <p:spPr>
+          <a:xfrm>
+            <a:off x="846060" y="3938577"/>
+            <a:ext cx="4542780" cy="530225"/>
+          </a:xfrm>
+          <a:prstGeom prst="rect">
+            <a:avLst/>
+          </a:prstGeom>
+        </p:spPr>
+        <p:txBody>
+          <a:bodyPr wrap="square" lIns="0" tIns="0" rIns="0" bIns="0" rtlCol="0" anchor="t">
+            <a:spAutoFit/>
+          </a:bodyPr>
+          <a:lstStyle/>
+          <a:p>
+            <a:pPr algn="ctr">
+              <a:lnSpc>
+                <a:spcPts val="3999"/>
+              </a:lnSpc>
+            </a:pPr>
+            <a:r>
+              <a:rPr lang="en-US" sz="3999" b="1" spc="207" dirty="0">
+                <a:solidFill>
+                  <a:srgbClr val="737373"/>
+                </a:solidFill>
+                <a:latin typeface="Inter Bold"/>
+                <a:ea typeface="Inter Bold"/>
+                <a:cs typeface="Inter Bold"/>
+                <a:sym typeface="Inter Bold"/>
+              </a:rPr>
+              <a:t>$0 USD/month</a:t>
+            </a:r>
+          </a:p>
+        </p:txBody>
+      </p:sp>
+      <p:sp>
+        <p:nvSpPr>
+          <p:cNvPr id="37" name="TextBox 37"/>
+          <p:cNvSpPr txBox="1"/>
+          <p:nvPr/>
+        </p:nvSpPr>
+        <p:spPr>
+          <a:xfrm>
+            <a:off x="12639950" y="5059196"/>
+            <a:ext cx="4547424" cy="3569265"/>
+          </a:xfrm>
+          <a:prstGeom prst="rect">
+            <a:avLst/>
+          </a:prstGeom>
+        </p:spPr>
+        <p:txBody>
+          <a:bodyPr lIns="0" tIns="0" rIns="0" bIns="0" rtlCol="0" anchor="t">
+            <a:spAutoFit/>
+          </a:bodyPr>
+          <a:lstStyle/>
+          <a:p>
+            <a:pPr marL="537442" lvl="1" indent="-268721" algn="just">
+              <a:lnSpc>
+                <a:spcPts val="4057"/>
+              </a:lnSpc>
+              <a:buFont typeface="Arial"/>
+              <a:buChar char="•"/>
+            </a:pPr>
+            <a:r>
+              <a:rPr lang="en-US" sz="2489">
+                <a:solidFill>
+                  <a:srgbClr val="000000"/>
+                </a:solidFill>
+                <a:latin typeface="Helios"/>
+                <a:ea typeface="Helios"/>
+                <a:cs typeface="Helios"/>
+                <a:sym typeface="Helios"/>
+              </a:rPr>
+              <a:t>All Pro benefits at half price.</a:t>
+            </a:r>
+          </a:p>
+          <a:p>
+            <a:pPr marL="537442" lvl="1" indent="-268721" algn="just">
+              <a:lnSpc>
+                <a:spcPts val="4057"/>
+              </a:lnSpc>
+              <a:buFont typeface="Arial"/>
+              <a:buChar char="•"/>
+            </a:pPr>
+            <a:r>
+              <a:rPr lang="en-US" sz="2489">
+                <a:solidFill>
+                  <a:srgbClr val="000000"/>
+                </a:solidFill>
+                <a:latin typeface="Helios"/>
+                <a:ea typeface="Helios"/>
+                <a:cs typeface="Helios"/>
+                <a:sym typeface="Helios"/>
+              </a:rPr>
+              <a:t>Rate guaranteed for 3 years.</a:t>
+            </a:r>
+          </a:p>
+          <a:p>
+            <a:pPr marL="537591" lvl="1" indent="-268796" algn="just">
+              <a:lnSpc>
+                <a:spcPts val="4058"/>
+              </a:lnSpc>
+              <a:buFont typeface="Arial"/>
+              <a:buChar char="•"/>
+            </a:pPr>
+            <a:r>
+              <a:rPr lang="en-US" sz="2490" i="1">
+                <a:solidFill>
+                  <a:srgbClr val="000000"/>
+                </a:solidFill>
+                <a:latin typeface="Helios Italics"/>
+                <a:ea typeface="Helios Italics"/>
+                <a:cs typeface="Helios Italics"/>
+                <a:sym typeface="Helios Italics"/>
+              </a:rPr>
+              <a:t>Requires an application via institutional email, including proof of enrollment and academic transcript.</a:t>
+            </a:r>
+          </a:p>
+        </p:txBody>
+      </p:sp>
+      <p:sp>
+        <p:nvSpPr>
+          <p:cNvPr id="38" name="TextBox 38"/>
+          <p:cNvSpPr txBox="1"/>
+          <p:nvPr/>
+        </p:nvSpPr>
+        <p:spPr>
+          <a:xfrm>
+            <a:off x="12745482" y="3274416"/>
+            <a:ext cx="3662244" cy="660400"/>
+          </a:xfrm>
+          <a:prstGeom prst="rect">
+            <a:avLst/>
+          </a:prstGeom>
+        </p:spPr>
+        <p:txBody>
+          <a:bodyPr lIns="0" tIns="0" rIns="0" bIns="0" rtlCol="0" anchor="t">
+            <a:spAutoFit/>
+          </a:bodyPr>
+          <a:lstStyle/>
+          <a:p>
+            <a:pPr algn="ctr">
+              <a:lnSpc>
+                <a:spcPts val="5000"/>
+              </a:lnSpc>
+            </a:pPr>
+            <a:r>
+              <a:rPr lang="en-US" sz="5000" b="1" spc="260" dirty="0">
+                <a:solidFill>
+                  <a:srgbClr val="262262"/>
+                </a:solidFill>
+                <a:latin typeface="Inter Bold"/>
+                <a:ea typeface="Inter Bold"/>
+                <a:cs typeface="Inter Bold"/>
+                <a:sym typeface="Inter Bold"/>
+              </a:rPr>
+              <a:t>University </a:t>
+            </a:r>
+          </a:p>
+        </p:txBody>
+      </p:sp>
+      <p:sp>
+        <p:nvSpPr>
+          <p:cNvPr id="39" name="TextBox 39"/>
+          <p:cNvSpPr txBox="1"/>
+          <p:nvPr/>
+        </p:nvSpPr>
+        <p:spPr>
+          <a:xfrm>
+            <a:off x="12745482" y="4011016"/>
+            <a:ext cx="2708434" cy="530225"/>
+          </a:xfrm>
+          <a:prstGeom prst="rect">
+            <a:avLst/>
+          </a:prstGeom>
+        </p:spPr>
+        <p:txBody>
+          <a:bodyPr lIns="0" tIns="0" rIns="0" bIns="0" rtlCol="0" anchor="t">
+            <a:spAutoFit/>
+          </a:bodyPr>
+          <a:lstStyle/>
+          <a:p>
+            <a:pPr algn="ctr">
+              <a:lnSpc>
+                <a:spcPts val="3999"/>
+              </a:lnSpc>
+            </a:pPr>
+            <a:r>
+              <a:rPr lang="en-US" sz="3999" b="1" spc="207">
+                <a:solidFill>
+                  <a:srgbClr val="737373"/>
+                </a:solidFill>
+                <a:latin typeface="Inter Bold"/>
+                <a:ea typeface="Inter Bold"/>
+                <a:cs typeface="Inter Bold"/>
+                <a:sym typeface="Inter Bold"/>
+              </a:rPr>
+              <a:t>-50% OFF</a:t>
+            </a:r>
+          </a:p>
+        </p:txBody>
+      </p:sp>
+    </p:spTree>
+  </p:cSld>
+  <p:clrMapOvr>
+    <a:masterClrMapping/>
+  </p:clrMapOvr>
+</p:sld>
+</file>
+
+<file path=ppt/slides/slide11.xml><?xml version="1.0" encoding="utf-8"?>
+<p:sld xmlns:a="http://schemas.openxmlformats.org/drawingml/2006/main" xmlns:r="http://schemas.openxmlformats.org/officeDocument/2006/relationships" xmlns:p="http://schemas.openxmlformats.org/presentationml/2006/main">
+  <p:cSld>
     <p:bg>
       <p:bgPr>
         <a:solidFill>
@@ -4694,7 +6176,7 @@
 </p:sld>
 </file>
 
-<file path=ppt/slides/slide11.xml><?xml version="1.0" encoding="utf-8"?>
+<file path=ppt/slides/slide12.xml><?xml version="1.0" encoding="utf-8"?>
 <p:sld xmlns:a="http://schemas.openxmlformats.org/drawingml/2006/main" xmlns:r="http://schemas.openxmlformats.org/officeDocument/2006/relationships" xmlns:p="http://schemas.openxmlformats.org/presentationml/2006/main">
   <p:cSld>
     <p:spTree>
@@ -5327,6 +6809,420 @@
 </file>
 
 <file path=ppt/slides/slide2.xml><?xml version="1.0" encoding="utf-8"?>
+<p:sld xmlns:a="http://schemas.openxmlformats.org/drawingml/2006/main" xmlns:r="http://schemas.openxmlformats.org/officeDocument/2006/relationships" xmlns:p="http://schemas.openxmlformats.org/presentationml/2006/main">
+  <p:cSld>
+    <p:spTree>
+      <p:nvGrpSpPr>
+        <p:cNvPr id="1" name=""/>
+        <p:cNvGrpSpPr/>
+        <p:nvPr/>
+      </p:nvGrpSpPr>
+      <p:grpSpPr>
+        <a:xfrm>
+          <a:off x="0" y="0"/>
+          <a:ext cx="0" cy="0"/>
+          <a:chOff x="0" y="0"/>
+          <a:chExt cx="0" cy="0"/>
+        </a:xfrm>
+      </p:grpSpPr>
+      <p:sp>
+        <p:nvSpPr>
+          <p:cNvPr id="11" name="Freeform 6">
+            <a:extLst>
+              <a:ext uri="{FF2B5EF4-FFF2-40B4-BE49-F238E27FC236}">
+                <a16:creationId xmlns:a16="http://schemas.microsoft.com/office/drawing/2014/main" id="{2C0DE747-1BDA-E015-9A71-824EF5EF4B94}"/>
+              </a:ext>
+            </a:extLst>
+          </p:cNvPr>
+          <p:cNvSpPr/>
+          <p:nvPr/>
+        </p:nvSpPr>
+        <p:spPr>
+          <a:xfrm>
+            <a:off x="1" y="820184"/>
+            <a:ext cx="18288000" cy="8357014"/>
+          </a:xfrm>
+          <a:custGeom>
+            <a:avLst/>
+            <a:gdLst/>
+            <a:ahLst/>
+            <a:cxnLst/>
+            <a:rect l="l" t="t" r="r" b="b"/>
+            <a:pathLst>
+              <a:path w="3406019" h="3831772">
+                <a:moveTo>
+                  <a:pt x="0" y="0"/>
+                </a:moveTo>
+                <a:lnTo>
+                  <a:pt x="3406019" y="0"/>
+                </a:lnTo>
+                <a:lnTo>
+                  <a:pt x="3406019" y="3831772"/>
+                </a:lnTo>
+                <a:lnTo>
+                  <a:pt x="0" y="3831772"/>
+                </a:lnTo>
+                <a:close/>
+              </a:path>
+            </a:pathLst>
+          </a:custGeom>
+          <a:solidFill>
+            <a:srgbClr val="97E6FF"/>
+          </a:solidFill>
+        </p:spPr>
+        <p:txBody>
+          <a:bodyPr/>
+          <a:lstStyle/>
+          <a:p>
+            <a:endParaRPr lang="es-MX"/>
+          </a:p>
+        </p:txBody>
+      </p:sp>
+      <p:grpSp>
+        <p:nvGrpSpPr>
+          <p:cNvPr id="2" name="Group 2"/>
+          <p:cNvGrpSpPr/>
+          <p:nvPr/>
+        </p:nvGrpSpPr>
+        <p:grpSpPr>
+          <a:xfrm>
+            <a:off x="0" y="8594059"/>
+            <a:ext cx="18288000" cy="1692941"/>
+            <a:chOff x="0" y="0"/>
+            <a:chExt cx="6214790" cy="630598"/>
+          </a:xfrm>
+        </p:grpSpPr>
+        <p:sp>
+          <p:nvSpPr>
+            <p:cNvPr id="3" name="Freeform 3"/>
+            <p:cNvSpPr/>
+            <p:nvPr/>
+          </p:nvSpPr>
+          <p:spPr>
+            <a:xfrm>
+              <a:off x="0" y="0"/>
+              <a:ext cx="6214790" cy="630598"/>
+            </a:xfrm>
+            <a:custGeom>
+              <a:avLst/>
+              <a:gdLst/>
+              <a:ahLst/>
+              <a:cxnLst/>
+              <a:rect l="l" t="t" r="r" b="b"/>
+              <a:pathLst>
+                <a:path w="6214790" h="630598">
+                  <a:moveTo>
+                    <a:pt x="0" y="0"/>
+                  </a:moveTo>
+                  <a:lnTo>
+                    <a:pt x="6214790" y="0"/>
+                  </a:lnTo>
+                  <a:lnTo>
+                    <a:pt x="6214790" y="630598"/>
+                  </a:lnTo>
+                  <a:lnTo>
+                    <a:pt x="0" y="630598"/>
+                  </a:lnTo>
+                  <a:close/>
+                </a:path>
+              </a:pathLst>
+            </a:custGeom>
+            <a:solidFill>
+              <a:srgbClr val="262262"/>
+            </a:solidFill>
+          </p:spPr>
+          <p:txBody>
+            <a:bodyPr/>
+            <a:lstStyle/>
+            <a:p>
+              <a:endParaRPr lang="es-MX"/>
+            </a:p>
+          </p:txBody>
+        </p:sp>
+        <p:sp>
+          <p:nvSpPr>
+            <p:cNvPr id="4" name="TextBox 4"/>
+            <p:cNvSpPr txBox="1"/>
+            <p:nvPr/>
+          </p:nvSpPr>
+          <p:spPr>
+            <a:xfrm>
+              <a:off x="0" y="-28575"/>
+              <a:ext cx="6214790" cy="659173"/>
+            </a:xfrm>
+            <a:prstGeom prst="rect">
+              <a:avLst/>
+            </a:prstGeom>
+          </p:spPr>
+          <p:txBody>
+            <a:bodyPr lIns="48876" tIns="48876" rIns="48876" bIns="48876" rtlCol="0" anchor="ctr"/>
+            <a:lstStyle/>
+            <a:p>
+              <a:pPr algn="ctr">
+                <a:lnSpc>
+                  <a:spcPts val="2344"/>
+                </a:lnSpc>
+              </a:pPr>
+              <a:endParaRPr/>
+            </a:p>
+          </p:txBody>
+        </p:sp>
+      </p:grpSp>
+      <p:grpSp>
+        <p:nvGrpSpPr>
+          <p:cNvPr id="5" name="Group 5"/>
+          <p:cNvGrpSpPr/>
+          <p:nvPr/>
+        </p:nvGrpSpPr>
+        <p:grpSpPr>
+          <a:xfrm>
+            <a:off x="0" y="0"/>
+            <a:ext cx="18288000" cy="1326609"/>
+            <a:chOff x="0" y="0"/>
+            <a:chExt cx="6812038" cy="494144"/>
+          </a:xfrm>
+        </p:grpSpPr>
+        <p:sp>
+          <p:nvSpPr>
+            <p:cNvPr id="6" name="Freeform 6"/>
+            <p:cNvSpPr/>
+            <p:nvPr/>
+          </p:nvSpPr>
+          <p:spPr>
+            <a:xfrm>
+              <a:off x="0" y="0"/>
+              <a:ext cx="6812038" cy="494144"/>
+            </a:xfrm>
+            <a:custGeom>
+              <a:avLst/>
+              <a:gdLst/>
+              <a:ahLst/>
+              <a:cxnLst/>
+              <a:rect l="l" t="t" r="r" b="b"/>
+              <a:pathLst>
+                <a:path w="6812038" h="494144">
+                  <a:moveTo>
+                    <a:pt x="0" y="0"/>
+                  </a:moveTo>
+                  <a:lnTo>
+                    <a:pt x="6812038" y="0"/>
+                  </a:lnTo>
+                  <a:lnTo>
+                    <a:pt x="6812038" y="494144"/>
+                  </a:lnTo>
+                  <a:lnTo>
+                    <a:pt x="0" y="494144"/>
+                  </a:lnTo>
+                  <a:close/>
+                </a:path>
+              </a:pathLst>
+            </a:custGeom>
+            <a:solidFill>
+              <a:srgbClr val="262262"/>
+            </a:solidFill>
+          </p:spPr>
+          <p:txBody>
+            <a:bodyPr/>
+            <a:lstStyle/>
+            <a:p>
+              <a:endParaRPr lang="es-MX"/>
+            </a:p>
+          </p:txBody>
+        </p:sp>
+        <p:sp>
+          <p:nvSpPr>
+            <p:cNvPr id="7" name="TextBox 7"/>
+            <p:cNvSpPr txBox="1"/>
+            <p:nvPr/>
+          </p:nvSpPr>
+          <p:spPr>
+            <a:xfrm>
+              <a:off x="0" y="-28575"/>
+              <a:ext cx="6812038" cy="522719"/>
+            </a:xfrm>
+            <a:prstGeom prst="rect">
+              <a:avLst/>
+            </a:prstGeom>
+          </p:spPr>
+          <p:txBody>
+            <a:bodyPr lIns="48876" tIns="48876" rIns="48876" bIns="48876" rtlCol="0" anchor="ctr"/>
+            <a:lstStyle/>
+            <a:p>
+              <a:pPr algn="ctr">
+                <a:lnSpc>
+                  <a:spcPts val="2344"/>
+                </a:lnSpc>
+              </a:pPr>
+              <a:endParaRPr/>
+            </a:p>
+          </p:txBody>
+        </p:sp>
+      </p:grpSp>
+      <p:sp>
+        <p:nvSpPr>
+          <p:cNvPr id="8" name="TextBox 8"/>
+          <p:cNvSpPr txBox="1"/>
+          <p:nvPr/>
+        </p:nvSpPr>
+        <p:spPr>
+          <a:xfrm>
+            <a:off x="1140694" y="1915793"/>
+            <a:ext cx="16006612" cy="2555249"/>
+          </a:xfrm>
+          <a:prstGeom prst="rect">
+            <a:avLst/>
+          </a:prstGeom>
+        </p:spPr>
+        <p:txBody>
+          <a:bodyPr lIns="0" tIns="0" rIns="0" bIns="0" rtlCol="0" anchor="t">
+            <a:spAutoFit/>
+          </a:bodyPr>
+          <a:lstStyle/>
+          <a:p>
+            <a:pPr algn="ctr">
+              <a:lnSpc>
+                <a:spcPts val="20870"/>
+              </a:lnSpc>
+              <a:spcBef>
+                <a:spcPct val="0"/>
+              </a:spcBef>
+            </a:pPr>
+            <a:r>
+              <a:rPr lang="en-US" sz="14907" b="1">
+                <a:solidFill>
+                  <a:srgbClr val="4263EB"/>
+                </a:solidFill>
+                <a:latin typeface="Clear Sans Bold"/>
+                <a:ea typeface="Clear Sans Bold"/>
+                <a:cs typeface="Clear Sans Bold"/>
+                <a:sym typeface="Clear Sans Bold"/>
+              </a:rPr>
+              <a:t>C-OVERCHARGED</a:t>
+            </a:r>
+          </a:p>
+        </p:txBody>
+      </p:sp>
+      <p:sp>
+        <p:nvSpPr>
+          <p:cNvPr id="9" name="Freeform 9"/>
+          <p:cNvSpPr/>
+          <p:nvPr/>
+        </p:nvSpPr>
+        <p:spPr>
+          <a:xfrm rot="-10800000" flipV="1">
+            <a:off x="13003179" y="2386703"/>
+            <a:ext cx="6444000" cy="8204166"/>
+          </a:xfrm>
+          <a:custGeom>
+            <a:avLst/>
+            <a:gdLst/>
+            <a:ahLst/>
+            <a:cxnLst/>
+            <a:rect l="l" t="t" r="r" b="b"/>
+            <a:pathLst>
+              <a:path w="6444000" h="8204166">
+                <a:moveTo>
+                  <a:pt x="0" y="8204167"/>
+                </a:moveTo>
+                <a:lnTo>
+                  <a:pt x="6444000" y="8204167"/>
+                </a:lnTo>
+                <a:lnTo>
+                  <a:pt x="6444000" y="0"/>
+                </a:lnTo>
+                <a:lnTo>
+                  <a:pt x="0" y="0"/>
+                </a:lnTo>
+                <a:lnTo>
+                  <a:pt x="0" y="8204167"/>
+                </a:lnTo>
+                <a:close/>
+              </a:path>
+            </a:pathLst>
+          </a:custGeom>
+          <a:blipFill>
+            <a:blip>
+              <a:extLst>
+                <a:ext uri="{96DAC541-7B7A-43D3-8B79-37D633B846F1}">
+                  <asvg:svgBlip xmlns:asvg="http://schemas.microsoft.com/office/drawing/2016/SVG/main" r:embed="rId2"/>
+                </a:ext>
+              </a:extLst>
+            </a:blip>
+            <a:stretch>
+              <a:fillRect/>
+            </a:stretch>
+          </a:blipFill>
+        </p:spPr>
+        <p:txBody>
+          <a:bodyPr/>
+          <a:lstStyle/>
+          <a:p>
+            <a:endParaRPr lang="es-MX"/>
+          </a:p>
+        </p:txBody>
+      </p:sp>
+      <p:sp>
+        <p:nvSpPr>
+          <p:cNvPr id="10" name="Freeform 10"/>
+          <p:cNvSpPr/>
+          <p:nvPr/>
+        </p:nvSpPr>
+        <p:spPr>
+          <a:xfrm>
+            <a:off x="7579556" y="5080235"/>
+            <a:ext cx="3128888" cy="2719472"/>
+          </a:xfrm>
+          <a:custGeom>
+            <a:avLst/>
+            <a:gdLst/>
+            <a:ahLst/>
+            <a:cxnLst/>
+            <a:rect l="l" t="t" r="r" b="b"/>
+            <a:pathLst>
+              <a:path w="3128888" h="2719472">
+                <a:moveTo>
+                  <a:pt x="0" y="0"/>
+                </a:moveTo>
+                <a:lnTo>
+                  <a:pt x="3128888" y="0"/>
+                </a:lnTo>
+                <a:lnTo>
+                  <a:pt x="3128888" y="2719472"/>
+                </a:lnTo>
+                <a:lnTo>
+                  <a:pt x="0" y="2719472"/>
+                </a:lnTo>
+                <a:lnTo>
+                  <a:pt x="0" y="0"/>
+                </a:lnTo>
+                <a:close/>
+              </a:path>
+            </a:pathLst>
+          </a:custGeom>
+          <a:blipFill>
+            <a:blip r:embed="rId3"/>
+            <a:stretch>
+              <a:fillRect l="-47596" r="-50728" b="-46647"/>
+            </a:stretch>
+          </a:blipFill>
+        </p:spPr>
+        <p:txBody>
+          <a:bodyPr/>
+          <a:lstStyle/>
+          <a:p>
+            <a:endParaRPr lang="es-MX"/>
+          </a:p>
+        </p:txBody>
+      </p:sp>
+    </p:spTree>
+  </p:cSld>
+  <p:clrMapOvr>
+    <a:masterClrMapping/>
+  </p:clrMapOvr>
+</p:sld>
+</file>
+
+<file path=ppt/slides/slide3.xml><?xml version="1.0" encoding="utf-8"?>
 <p:sld xmlns:a="http://schemas.openxmlformats.org/drawingml/2006/main" xmlns:r="http://schemas.openxmlformats.org/officeDocument/2006/relationships" xmlns:p="http://schemas.openxmlformats.org/presentationml/2006/main">
   <p:cSld>
     <p:spTree>
@@ -5653,7 +7549,7 @@
         </p:nvSpPr>
         <p:spPr>
           <a:xfrm>
-            <a:off x="47625" y="1173571"/>
+            <a:off x="44422" y="1173572"/>
             <a:ext cx="8810625" cy="8357014"/>
           </a:xfrm>
           <a:custGeom>
@@ -6629,7 +8525,7 @@
 </p:sld>
 </file>
 
-<file path=ppt/slides/slide3.xml><?xml version="1.0" encoding="utf-8"?>
+<file path=ppt/slides/slide4.xml><?xml version="1.0" encoding="utf-8"?>
 <p:sld xmlns:a="http://schemas.openxmlformats.org/drawingml/2006/main" xmlns:r="http://schemas.openxmlformats.org/officeDocument/2006/relationships" xmlns:p="http://schemas.openxmlformats.org/presentationml/2006/main">
   <p:cSld>
     <p:bg>
@@ -6971,59 +8867,6 @@
       </p:sp>
       <p:sp>
         <p:nvSpPr>
-          <p:cNvPr id="10" name="Freeform 10"/>
-          <p:cNvSpPr/>
-          <p:nvPr/>
-        </p:nvSpPr>
-        <p:spPr>
-          <a:xfrm>
-            <a:off x="7461250" y="8517345"/>
-            <a:ext cx="2349500" cy="1769655"/>
-          </a:xfrm>
-          <a:custGeom>
-            <a:avLst/>
-            <a:gdLst/>
-            <a:ahLst/>
-            <a:cxnLst/>
-            <a:rect l="l" t="t" r="r" b="b"/>
-            <a:pathLst>
-              <a:path w="3128888" h="2719472">
-                <a:moveTo>
-                  <a:pt x="0" y="0"/>
-                </a:moveTo>
-                <a:lnTo>
-                  <a:pt x="3128888" y="0"/>
-                </a:lnTo>
-                <a:lnTo>
-                  <a:pt x="3128888" y="2719472"/>
-                </a:lnTo>
-                <a:lnTo>
-                  <a:pt x="0" y="2719472"/>
-                </a:lnTo>
-                <a:lnTo>
-                  <a:pt x="0" y="0"/>
-                </a:lnTo>
-                <a:close/>
-              </a:path>
-            </a:pathLst>
-          </a:custGeom>
-          <a:blipFill>
-            <a:blip r:embed="rId3"/>
-            <a:stretch>
-              <a:fillRect l="-47596" r="-50728" b="-46647"/>
-            </a:stretch>
-          </a:blipFill>
-        </p:spPr>
-        <p:txBody>
-          <a:bodyPr/>
-          <a:lstStyle/>
-          <a:p>
-            <a:endParaRPr lang="es-MX"/>
-          </a:p>
-        </p:txBody>
-      </p:sp>
-      <p:sp>
-        <p:nvSpPr>
           <p:cNvPr id="13" name="TextBox 8">
             <a:extLst>
               <a:ext uri="{FF2B5EF4-FFF2-40B4-BE49-F238E27FC236}">
@@ -7890,7 +9733,7 @@
               <a:blip>
                 <a:extLst>
                   <a:ext uri="{96DAC541-7B7A-43D3-8B79-37D633B846F1}">
-                    <asvg:svgBlip xmlns:asvg="http://schemas.microsoft.com/office/drawing/2016/SVG/main" r:embed="rId4"/>
+                    <asvg:svgBlip xmlns:asvg="http://schemas.microsoft.com/office/drawing/2016/SVG/main" r:embed="rId3"/>
                   </a:ext>
                 </a:extLst>
               </a:blip>
@@ -7990,7 +9833,7 @@
 </p:sld>
 </file>
 
-<file path=ppt/slides/slide4.xml><?xml version="1.0" encoding="utf-8"?>
+<file path=ppt/slides/slide5.xml><?xml version="1.0" encoding="utf-8"?>
 <p:sld xmlns:a="http://schemas.openxmlformats.org/drawingml/2006/main" xmlns:r="http://schemas.openxmlformats.org/officeDocument/2006/relationships" xmlns:p="http://schemas.openxmlformats.org/presentationml/2006/main">
   <p:cSld>
     <p:spTree>
@@ -10481,7 +12324,7 @@
 </p:sld>
 </file>
 
-<file path=ppt/slides/slide5.xml><?xml version="1.0" encoding="utf-8"?>
+<file path=ppt/slides/slide6.xml><?xml version="1.0" encoding="utf-8"?>
 <p:sld xmlns:a="http://schemas.openxmlformats.org/drawingml/2006/main" xmlns:r="http://schemas.openxmlformats.org/officeDocument/2006/relationships" xmlns:p="http://schemas.openxmlformats.org/presentationml/2006/main">
   <p:cSld>
     <p:spTree>
@@ -12785,7 +14628,7 @@
 </p:sld>
 </file>
 
-<file path=ppt/slides/slide6.xml><?xml version="1.0" encoding="utf-8"?>
+<file path=ppt/slides/slide7.xml><?xml version="1.0" encoding="utf-8"?>
 <p:sld xmlns:a="http://schemas.openxmlformats.org/drawingml/2006/main" xmlns:r="http://schemas.openxmlformats.org/officeDocument/2006/relationships" xmlns:p="http://schemas.openxmlformats.org/presentationml/2006/main">
   <p:cSld>
     <p:spTree>
@@ -14178,7 +16021,7 @@
 </p:sld>
 </file>
 
-<file path=ppt/slides/slide7.xml><?xml version="1.0" encoding="utf-8"?>
+<file path=ppt/slides/slide8.xml><?xml version="1.0" encoding="utf-8"?>
 <p:sld xmlns:a="http://schemas.openxmlformats.org/drawingml/2006/main" xmlns:r="http://schemas.openxmlformats.org/officeDocument/2006/relationships" xmlns:p="http://schemas.openxmlformats.org/presentationml/2006/main">
   <p:cSld>
     <p:spTree>
@@ -15298,7 +17141,7 @@
 </p:sld>
 </file>
 
-<file path=ppt/slides/slide8.xml><?xml version="1.0" encoding="utf-8"?>
+<file path=ppt/slides/slide9.xml><?xml version="1.0" encoding="utf-8"?>
 <p:sld xmlns:a="http://schemas.openxmlformats.org/drawingml/2006/main" xmlns:r="http://schemas.openxmlformats.org/officeDocument/2006/relationships" xmlns:p="http://schemas.openxmlformats.org/presentationml/2006/main">
   <p:cSld>
     <p:bg>
@@ -15721,1491 +17564,6 @@
                 <a:sym typeface="JetBrains Mono Bold"/>
               </a:rPr>
               <a:t>ortability</a:t>
-            </a:r>
-          </a:p>
-        </p:txBody>
-      </p:sp>
-    </p:spTree>
-  </p:cSld>
-  <p:clrMapOvr>
-    <a:masterClrMapping/>
-  </p:clrMapOvr>
-</p:sld>
-</file>
-
-<file path=ppt/slides/slide9.xml><?xml version="1.0" encoding="utf-8"?>
-<p:sld xmlns:a="http://schemas.openxmlformats.org/drawingml/2006/main" xmlns:r="http://schemas.openxmlformats.org/officeDocument/2006/relationships" xmlns:p="http://schemas.openxmlformats.org/presentationml/2006/main">
-  <p:cSld>
-    <p:spTree>
-      <p:nvGrpSpPr>
-        <p:cNvPr id="1" name=""/>
-        <p:cNvGrpSpPr/>
-        <p:nvPr/>
-      </p:nvGrpSpPr>
-      <p:grpSpPr>
-        <a:xfrm>
-          <a:off x="0" y="0"/>
-          <a:ext cx="0" cy="0"/>
-          <a:chOff x="0" y="0"/>
-          <a:chExt cx="0" cy="0"/>
-        </a:xfrm>
-      </p:grpSpPr>
-      <p:grpSp>
-        <p:nvGrpSpPr>
-          <p:cNvPr id="2" name="Group 2"/>
-          <p:cNvGrpSpPr/>
-          <p:nvPr/>
-        </p:nvGrpSpPr>
-        <p:grpSpPr>
-          <a:xfrm rot="5400000">
-            <a:off x="8745955" y="-11573203"/>
-            <a:ext cx="1419301" cy="23086583"/>
-            <a:chOff x="0" y="0"/>
-            <a:chExt cx="528671" cy="8599447"/>
-          </a:xfrm>
-        </p:grpSpPr>
-        <p:sp>
-          <p:nvSpPr>
-            <p:cNvPr id="3" name="Freeform 3"/>
-            <p:cNvSpPr/>
-            <p:nvPr/>
-          </p:nvSpPr>
-          <p:spPr>
-            <a:xfrm>
-              <a:off x="0" y="0"/>
-              <a:ext cx="528671" cy="8599446"/>
-            </a:xfrm>
-            <a:custGeom>
-              <a:avLst/>
-              <a:gdLst/>
-              <a:ahLst/>
-              <a:cxnLst/>
-              <a:rect l="l" t="t" r="r" b="b"/>
-              <a:pathLst>
-                <a:path w="528671" h="8599446">
-                  <a:moveTo>
-                    <a:pt x="0" y="0"/>
-                  </a:moveTo>
-                  <a:lnTo>
-                    <a:pt x="528671" y="0"/>
-                  </a:lnTo>
-                  <a:lnTo>
-                    <a:pt x="528671" y="8599446"/>
-                  </a:lnTo>
-                  <a:lnTo>
-                    <a:pt x="0" y="8599446"/>
-                  </a:lnTo>
-                  <a:close/>
-                </a:path>
-              </a:pathLst>
-            </a:custGeom>
-            <a:solidFill>
-              <a:srgbClr val="262262"/>
-            </a:solidFill>
-          </p:spPr>
-          <p:txBody>
-            <a:bodyPr/>
-            <a:lstStyle/>
-            <a:p>
-              <a:endParaRPr lang="es-MX"/>
-            </a:p>
-          </p:txBody>
-        </p:sp>
-        <p:sp>
-          <p:nvSpPr>
-            <p:cNvPr id="4" name="TextBox 4"/>
-            <p:cNvSpPr txBox="1"/>
-            <p:nvPr/>
-          </p:nvSpPr>
-          <p:spPr>
-            <a:xfrm>
-              <a:off x="0" y="-28575"/>
-              <a:ext cx="528671" cy="8628022"/>
-            </a:xfrm>
-            <a:prstGeom prst="rect">
-              <a:avLst/>
-            </a:prstGeom>
-          </p:spPr>
-          <p:txBody>
-            <a:bodyPr lIns="48876" tIns="48876" rIns="48876" bIns="48876" rtlCol="0" anchor="ctr"/>
-            <a:lstStyle/>
-            <a:p>
-              <a:pPr algn="ctr">
-                <a:lnSpc>
-                  <a:spcPts val="2344"/>
-                </a:lnSpc>
-              </a:pPr>
-              <a:endParaRPr/>
-            </a:p>
-          </p:txBody>
-        </p:sp>
-      </p:grpSp>
-      <p:grpSp>
-        <p:nvGrpSpPr>
-          <p:cNvPr id="5" name="Group 5"/>
-          <p:cNvGrpSpPr/>
-          <p:nvPr/>
-        </p:nvGrpSpPr>
-        <p:grpSpPr>
-          <a:xfrm>
-            <a:off x="6593815" y="2585693"/>
-            <a:ext cx="5389667" cy="6871045"/>
-            <a:chOff x="0" y="0"/>
-            <a:chExt cx="1419501" cy="1809658"/>
-          </a:xfrm>
-        </p:grpSpPr>
-        <p:sp>
-          <p:nvSpPr>
-            <p:cNvPr id="6" name="Freeform 6"/>
-            <p:cNvSpPr/>
-            <p:nvPr/>
-          </p:nvSpPr>
-          <p:spPr>
-            <a:xfrm>
-              <a:off x="0" y="0"/>
-              <a:ext cx="1419501" cy="1809658"/>
-            </a:xfrm>
-            <a:custGeom>
-              <a:avLst/>
-              <a:gdLst/>
-              <a:ahLst/>
-              <a:cxnLst/>
-              <a:rect l="l" t="t" r="r" b="b"/>
-              <a:pathLst>
-                <a:path w="1419501" h="1809658">
-                  <a:moveTo>
-                    <a:pt x="0" y="0"/>
-                  </a:moveTo>
-                  <a:lnTo>
-                    <a:pt x="1419501" y="0"/>
-                  </a:lnTo>
-                  <a:lnTo>
-                    <a:pt x="1419501" y="1809658"/>
-                  </a:lnTo>
-                  <a:lnTo>
-                    <a:pt x="0" y="1809658"/>
-                  </a:lnTo>
-                  <a:close/>
-                </a:path>
-              </a:pathLst>
-            </a:custGeom>
-            <a:solidFill>
-              <a:srgbClr val="000000"/>
-            </a:solidFill>
-          </p:spPr>
-          <p:txBody>
-            <a:bodyPr/>
-            <a:lstStyle/>
-            <a:p>
-              <a:endParaRPr lang="es-MX"/>
-            </a:p>
-          </p:txBody>
-        </p:sp>
-        <p:sp>
-          <p:nvSpPr>
-            <p:cNvPr id="7" name="TextBox 7"/>
-            <p:cNvSpPr txBox="1"/>
-            <p:nvPr/>
-          </p:nvSpPr>
-          <p:spPr>
-            <a:xfrm>
-              <a:off x="0" y="-28575"/>
-              <a:ext cx="1419501" cy="1838233"/>
-            </a:xfrm>
-            <a:prstGeom prst="rect">
-              <a:avLst/>
-            </a:prstGeom>
-          </p:spPr>
-          <p:txBody>
-            <a:bodyPr lIns="50800" tIns="50800" rIns="50800" bIns="50800" rtlCol="0" anchor="ctr"/>
-            <a:lstStyle/>
-            <a:p>
-              <a:pPr algn="ctr">
-                <a:lnSpc>
-                  <a:spcPts val="2344"/>
-                </a:lnSpc>
-              </a:pPr>
-              <a:endParaRPr/>
-            </a:p>
-          </p:txBody>
-        </p:sp>
-      </p:grpSp>
-      <p:grpSp>
-        <p:nvGrpSpPr>
-          <p:cNvPr id="8" name="Group 8"/>
-          <p:cNvGrpSpPr/>
-          <p:nvPr/>
-        </p:nvGrpSpPr>
-        <p:grpSpPr>
-          <a:xfrm>
-            <a:off x="6368533" y="2426326"/>
-            <a:ext cx="5459435" cy="6882349"/>
-            <a:chOff x="0" y="0"/>
-            <a:chExt cx="1386289" cy="1747603"/>
-          </a:xfrm>
-        </p:grpSpPr>
-        <p:sp>
-          <p:nvSpPr>
-            <p:cNvPr id="9" name="Freeform 9"/>
-            <p:cNvSpPr/>
-            <p:nvPr/>
-          </p:nvSpPr>
-          <p:spPr>
-            <a:xfrm>
-              <a:off x="0" y="0"/>
-              <a:ext cx="1386289" cy="1747603"/>
-            </a:xfrm>
-            <a:custGeom>
-              <a:avLst/>
-              <a:gdLst/>
-              <a:ahLst/>
-              <a:cxnLst/>
-              <a:rect l="l" t="t" r="r" b="b"/>
-              <a:pathLst>
-                <a:path w="1386289" h="1747603">
-                  <a:moveTo>
-                    <a:pt x="0" y="0"/>
-                  </a:moveTo>
-                  <a:lnTo>
-                    <a:pt x="1386289" y="0"/>
-                  </a:lnTo>
-                  <a:lnTo>
-                    <a:pt x="1386289" y="1747603"/>
-                  </a:lnTo>
-                  <a:lnTo>
-                    <a:pt x="0" y="1747603"/>
-                  </a:lnTo>
-                  <a:close/>
-                </a:path>
-              </a:pathLst>
-            </a:custGeom>
-            <a:solidFill>
-              <a:srgbClr val="00C2FF"/>
-            </a:solidFill>
-            <a:ln w="38100" cap="sq">
-              <a:solidFill>
-                <a:srgbClr val="000000"/>
-              </a:solidFill>
-              <a:prstDash val="solid"/>
-              <a:miter/>
-            </a:ln>
-          </p:spPr>
-          <p:txBody>
-            <a:bodyPr/>
-            <a:lstStyle/>
-            <a:p>
-              <a:endParaRPr lang="es-MX"/>
-            </a:p>
-          </p:txBody>
-        </p:sp>
-        <p:sp>
-          <p:nvSpPr>
-            <p:cNvPr id="10" name="TextBox 10"/>
-            <p:cNvSpPr txBox="1"/>
-            <p:nvPr/>
-          </p:nvSpPr>
-          <p:spPr>
-            <a:xfrm>
-              <a:off x="0" y="-28575"/>
-              <a:ext cx="1386289" cy="1776178"/>
-            </a:xfrm>
-            <a:prstGeom prst="rect">
-              <a:avLst/>
-            </a:prstGeom>
-          </p:spPr>
-          <p:txBody>
-            <a:bodyPr lIns="50800" tIns="50800" rIns="50800" bIns="50800" rtlCol="0" anchor="ctr"/>
-            <a:lstStyle/>
-            <a:p>
-              <a:pPr algn="ctr">
-                <a:lnSpc>
-                  <a:spcPts val="2344"/>
-                </a:lnSpc>
-              </a:pPr>
-              <a:endParaRPr/>
-            </a:p>
-          </p:txBody>
-        </p:sp>
-      </p:grpSp>
-      <p:sp>
-        <p:nvSpPr>
-          <p:cNvPr id="11" name="AutoShape 11"/>
-          <p:cNvSpPr/>
-          <p:nvPr/>
-        </p:nvSpPr>
-        <p:spPr>
-          <a:xfrm>
-            <a:off x="6748776" y="5074418"/>
-            <a:ext cx="4698950" cy="0"/>
-          </a:xfrm>
-          <a:prstGeom prst="line">
-            <a:avLst/>
-          </a:prstGeom>
-          <a:ln w="66675" cap="flat">
-            <a:solidFill>
-              <a:srgbClr val="000000"/>
-            </a:solidFill>
-            <a:prstDash val="solid"/>
-            <a:headEnd type="none" w="sm" len="sm"/>
-            <a:tailEnd type="none" w="sm" len="sm"/>
-          </a:ln>
-        </p:spPr>
-        <p:txBody>
-          <a:bodyPr/>
-          <a:lstStyle/>
-          <a:p>
-            <a:endParaRPr lang="es-MX"/>
-          </a:p>
-        </p:txBody>
-      </p:sp>
-      <p:grpSp>
-        <p:nvGrpSpPr>
-          <p:cNvPr id="12" name="Group 12"/>
-          <p:cNvGrpSpPr/>
-          <p:nvPr/>
-        </p:nvGrpSpPr>
-        <p:grpSpPr>
-          <a:xfrm>
-            <a:off x="6762737" y="2762674"/>
-            <a:ext cx="4671027" cy="513781"/>
-            <a:chOff x="0" y="0"/>
-            <a:chExt cx="1167218" cy="128386"/>
-          </a:xfrm>
-        </p:grpSpPr>
-        <p:sp>
-          <p:nvSpPr>
-            <p:cNvPr id="13" name="Freeform 13"/>
-            <p:cNvSpPr/>
-            <p:nvPr/>
-          </p:nvSpPr>
-          <p:spPr>
-            <a:xfrm>
-              <a:off x="0" y="0"/>
-              <a:ext cx="1167218" cy="128386"/>
-            </a:xfrm>
-            <a:custGeom>
-              <a:avLst/>
-              <a:gdLst/>
-              <a:ahLst/>
-              <a:cxnLst/>
-              <a:rect l="l" t="t" r="r" b="b"/>
-              <a:pathLst>
-                <a:path w="1167218" h="128386">
-                  <a:moveTo>
-                    <a:pt x="0" y="0"/>
-                  </a:moveTo>
-                  <a:lnTo>
-                    <a:pt x="1167218" y="0"/>
-                  </a:lnTo>
-                  <a:lnTo>
-                    <a:pt x="1167218" y="128386"/>
-                  </a:lnTo>
-                  <a:lnTo>
-                    <a:pt x="0" y="128386"/>
-                  </a:lnTo>
-                  <a:close/>
-                </a:path>
-              </a:pathLst>
-            </a:custGeom>
-            <a:solidFill>
-              <a:srgbClr val="FF2929"/>
-            </a:solidFill>
-            <a:ln w="28575" cap="sq">
-              <a:solidFill>
-                <a:srgbClr val="000000"/>
-              </a:solidFill>
-              <a:prstDash val="solid"/>
-              <a:miter/>
-            </a:ln>
-          </p:spPr>
-          <p:txBody>
-            <a:bodyPr/>
-            <a:lstStyle/>
-            <a:p>
-              <a:endParaRPr lang="es-MX"/>
-            </a:p>
-          </p:txBody>
-        </p:sp>
-        <p:sp>
-          <p:nvSpPr>
-            <p:cNvPr id="14" name="TextBox 14"/>
-            <p:cNvSpPr txBox="1"/>
-            <p:nvPr/>
-          </p:nvSpPr>
-          <p:spPr>
-            <a:xfrm>
-              <a:off x="0" y="-28575"/>
-              <a:ext cx="1167218" cy="156961"/>
-            </a:xfrm>
-            <a:prstGeom prst="rect">
-              <a:avLst/>
-            </a:prstGeom>
-          </p:spPr>
-          <p:txBody>
-            <a:bodyPr lIns="50800" tIns="50800" rIns="50800" bIns="50800" rtlCol="0" anchor="ctr"/>
-            <a:lstStyle/>
-            <a:p>
-              <a:pPr algn="r">
-                <a:lnSpc>
-                  <a:spcPts val="2659"/>
-                </a:lnSpc>
-              </a:pPr>
-              <a:endParaRPr/>
-            </a:p>
-          </p:txBody>
-        </p:sp>
-      </p:grpSp>
-      <p:grpSp>
-        <p:nvGrpSpPr>
-          <p:cNvPr id="15" name="Group 15"/>
-          <p:cNvGrpSpPr/>
-          <p:nvPr/>
-        </p:nvGrpSpPr>
-        <p:grpSpPr>
-          <a:xfrm>
-            <a:off x="629512" y="2958135"/>
-            <a:ext cx="5389667" cy="6246269"/>
-            <a:chOff x="0" y="0"/>
-            <a:chExt cx="1419501" cy="1645108"/>
-          </a:xfrm>
-        </p:grpSpPr>
-        <p:sp>
-          <p:nvSpPr>
-            <p:cNvPr id="16" name="Freeform 16"/>
-            <p:cNvSpPr/>
-            <p:nvPr/>
-          </p:nvSpPr>
-          <p:spPr>
-            <a:xfrm>
-              <a:off x="0" y="0"/>
-              <a:ext cx="1419501" cy="1645108"/>
-            </a:xfrm>
-            <a:custGeom>
-              <a:avLst/>
-              <a:gdLst/>
-              <a:ahLst/>
-              <a:cxnLst/>
-              <a:rect l="l" t="t" r="r" b="b"/>
-              <a:pathLst>
-                <a:path w="1419501" h="1645108">
-                  <a:moveTo>
-                    <a:pt x="0" y="0"/>
-                  </a:moveTo>
-                  <a:lnTo>
-                    <a:pt x="1419501" y="0"/>
-                  </a:lnTo>
-                  <a:lnTo>
-                    <a:pt x="1419501" y="1645108"/>
-                  </a:lnTo>
-                  <a:lnTo>
-                    <a:pt x="0" y="1645108"/>
-                  </a:lnTo>
-                  <a:close/>
-                </a:path>
-              </a:pathLst>
-            </a:custGeom>
-            <a:solidFill>
-              <a:srgbClr val="000000"/>
-            </a:solidFill>
-          </p:spPr>
-          <p:txBody>
-            <a:bodyPr/>
-            <a:lstStyle/>
-            <a:p>
-              <a:endParaRPr lang="es-MX"/>
-            </a:p>
-          </p:txBody>
-        </p:sp>
-        <p:sp>
-          <p:nvSpPr>
-            <p:cNvPr id="17" name="TextBox 17"/>
-            <p:cNvSpPr txBox="1"/>
-            <p:nvPr/>
-          </p:nvSpPr>
-          <p:spPr>
-            <a:xfrm>
-              <a:off x="0" y="-28575"/>
-              <a:ext cx="1419501" cy="1673683"/>
-            </a:xfrm>
-            <a:prstGeom prst="rect">
-              <a:avLst/>
-            </a:prstGeom>
-          </p:spPr>
-          <p:txBody>
-            <a:bodyPr lIns="50800" tIns="50800" rIns="50800" bIns="50800" rtlCol="0" anchor="ctr"/>
-            <a:lstStyle/>
-            <a:p>
-              <a:pPr algn="ctr">
-                <a:lnSpc>
-                  <a:spcPts val="2344"/>
-                </a:lnSpc>
-              </a:pPr>
-              <a:endParaRPr/>
-            </a:p>
-          </p:txBody>
-        </p:sp>
-      </p:grpSp>
-      <p:grpSp>
-        <p:nvGrpSpPr>
-          <p:cNvPr id="18" name="Group 18"/>
-          <p:cNvGrpSpPr/>
-          <p:nvPr/>
-        </p:nvGrpSpPr>
-        <p:grpSpPr>
-          <a:xfrm>
-            <a:off x="404231" y="2813259"/>
-            <a:ext cx="5459435" cy="6256546"/>
-            <a:chOff x="0" y="0"/>
-            <a:chExt cx="1386289" cy="1588696"/>
-          </a:xfrm>
-        </p:grpSpPr>
-        <p:sp>
-          <p:nvSpPr>
-            <p:cNvPr id="19" name="Freeform 19"/>
-            <p:cNvSpPr/>
-            <p:nvPr/>
-          </p:nvSpPr>
-          <p:spPr>
-            <a:xfrm>
-              <a:off x="0" y="0"/>
-              <a:ext cx="1386289" cy="1588696"/>
-            </a:xfrm>
-            <a:custGeom>
-              <a:avLst/>
-              <a:gdLst/>
-              <a:ahLst/>
-              <a:cxnLst/>
-              <a:rect l="l" t="t" r="r" b="b"/>
-              <a:pathLst>
-                <a:path w="1386289" h="1588696">
-                  <a:moveTo>
-                    <a:pt x="0" y="0"/>
-                  </a:moveTo>
-                  <a:lnTo>
-                    <a:pt x="1386289" y="0"/>
-                  </a:lnTo>
-                  <a:lnTo>
-                    <a:pt x="1386289" y="1588696"/>
-                  </a:lnTo>
-                  <a:lnTo>
-                    <a:pt x="0" y="1588696"/>
-                  </a:lnTo>
-                  <a:close/>
-                </a:path>
-              </a:pathLst>
-            </a:custGeom>
-            <a:solidFill>
-              <a:srgbClr val="FFFFFF"/>
-            </a:solidFill>
-            <a:ln w="38100" cap="sq">
-              <a:solidFill>
-                <a:srgbClr val="000000"/>
-              </a:solidFill>
-              <a:prstDash val="solid"/>
-              <a:miter/>
-            </a:ln>
-          </p:spPr>
-          <p:txBody>
-            <a:bodyPr/>
-            <a:lstStyle/>
-            <a:p>
-              <a:endParaRPr lang="es-MX"/>
-            </a:p>
-          </p:txBody>
-        </p:sp>
-        <p:sp>
-          <p:nvSpPr>
-            <p:cNvPr id="20" name="TextBox 20"/>
-            <p:cNvSpPr txBox="1"/>
-            <p:nvPr/>
-          </p:nvSpPr>
-          <p:spPr>
-            <a:xfrm>
-              <a:off x="0" y="-28575"/>
-              <a:ext cx="1386289" cy="1617271"/>
-            </a:xfrm>
-            <a:prstGeom prst="rect">
-              <a:avLst/>
-            </a:prstGeom>
-          </p:spPr>
-          <p:txBody>
-            <a:bodyPr lIns="50800" tIns="50800" rIns="50800" bIns="50800" rtlCol="0" anchor="ctr"/>
-            <a:lstStyle/>
-            <a:p>
-              <a:pPr algn="ctr">
-                <a:lnSpc>
-                  <a:spcPts val="2344"/>
-                </a:lnSpc>
-              </a:pPr>
-              <a:endParaRPr/>
-            </a:p>
-          </p:txBody>
-        </p:sp>
-      </p:grpSp>
-      <p:sp>
-        <p:nvSpPr>
-          <p:cNvPr id="21" name="AutoShape 21"/>
-          <p:cNvSpPr/>
-          <p:nvPr/>
-        </p:nvSpPr>
-        <p:spPr>
-          <a:xfrm>
-            <a:off x="784473" y="4740265"/>
-            <a:ext cx="4698950" cy="0"/>
-          </a:xfrm>
-          <a:prstGeom prst="line">
-            <a:avLst/>
-          </a:prstGeom>
-          <a:ln w="66675" cap="flat">
-            <a:solidFill>
-              <a:srgbClr val="000000"/>
-            </a:solidFill>
-            <a:prstDash val="solid"/>
-            <a:headEnd type="none" w="sm" len="sm"/>
-            <a:tailEnd type="none" w="sm" len="sm"/>
-          </a:ln>
-        </p:spPr>
-        <p:txBody>
-          <a:bodyPr/>
-          <a:lstStyle/>
-          <a:p>
-            <a:endParaRPr lang="es-MX"/>
-          </a:p>
-        </p:txBody>
-      </p:sp>
-      <p:grpSp>
-        <p:nvGrpSpPr>
-          <p:cNvPr id="22" name="Group 22"/>
-          <p:cNvGrpSpPr/>
-          <p:nvPr/>
-        </p:nvGrpSpPr>
-        <p:grpSpPr>
-          <a:xfrm>
-            <a:off x="12561189" y="3030574"/>
-            <a:ext cx="5389667" cy="6246269"/>
-            <a:chOff x="0" y="0"/>
-            <a:chExt cx="1419501" cy="1645108"/>
-          </a:xfrm>
-        </p:grpSpPr>
-        <p:sp>
-          <p:nvSpPr>
-            <p:cNvPr id="23" name="Freeform 23"/>
-            <p:cNvSpPr/>
-            <p:nvPr/>
-          </p:nvSpPr>
-          <p:spPr>
-            <a:xfrm>
-              <a:off x="0" y="0"/>
-              <a:ext cx="1419501" cy="1645108"/>
-            </a:xfrm>
-            <a:custGeom>
-              <a:avLst/>
-              <a:gdLst/>
-              <a:ahLst/>
-              <a:cxnLst/>
-              <a:rect l="l" t="t" r="r" b="b"/>
-              <a:pathLst>
-                <a:path w="1419501" h="1645108">
-                  <a:moveTo>
-                    <a:pt x="0" y="0"/>
-                  </a:moveTo>
-                  <a:lnTo>
-                    <a:pt x="1419501" y="0"/>
-                  </a:lnTo>
-                  <a:lnTo>
-                    <a:pt x="1419501" y="1645108"/>
-                  </a:lnTo>
-                  <a:lnTo>
-                    <a:pt x="0" y="1645108"/>
-                  </a:lnTo>
-                  <a:close/>
-                </a:path>
-              </a:pathLst>
-            </a:custGeom>
-            <a:solidFill>
-              <a:srgbClr val="000000"/>
-            </a:solidFill>
-          </p:spPr>
-          <p:txBody>
-            <a:bodyPr/>
-            <a:lstStyle/>
-            <a:p>
-              <a:endParaRPr lang="es-MX"/>
-            </a:p>
-          </p:txBody>
-        </p:sp>
-        <p:sp>
-          <p:nvSpPr>
-            <p:cNvPr id="24" name="TextBox 24"/>
-            <p:cNvSpPr txBox="1"/>
-            <p:nvPr/>
-          </p:nvSpPr>
-          <p:spPr>
-            <a:xfrm>
-              <a:off x="0" y="-28575"/>
-              <a:ext cx="1419501" cy="1673683"/>
-            </a:xfrm>
-            <a:prstGeom prst="rect">
-              <a:avLst/>
-            </a:prstGeom>
-          </p:spPr>
-          <p:txBody>
-            <a:bodyPr lIns="50800" tIns="50800" rIns="50800" bIns="50800" rtlCol="0" anchor="ctr"/>
-            <a:lstStyle/>
-            <a:p>
-              <a:pPr algn="ctr">
-                <a:lnSpc>
-                  <a:spcPts val="2344"/>
-                </a:lnSpc>
-              </a:pPr>
-              <a:endParaRPr/>
-            </a:p>
-          </p:txBody>
-        </p:sp>
-      </p:grpSp>
-      <p:grpSp>
-        <p:nvGrpSpPr>
-          <p:cNvPr id="25" name="Group 25"/>
-          <p:cNvGrpSpPr/>
-          <p:nvPr/>
-        </p:nvGrpSpPr>
-        <p:grpSpPr>
-          <a:xfrm>
-            <a:off x="12335907" y="2885697"/>
-            <a:ext cx="5459435" cy="6256546"/>
-            <a:chOff x="0" y="0"/>
-            <a:chExt cx="1386289" cy="1588696"/>
-          </a:xfrm>
-        </p:grpSpPr>
-        <p:sp>
-          <p:nvSpPr>
-            <p:cNvPr id="26" name="Freeform 26"/>
-            <p:cNvSpPr/>
-            <p:nvPr/>
-          </p:nvSpPr>
-          <p:spPr>
-            <a:xfrm>
-              <a:off x="0" y="0"/>
-              <a:ext cx="1386289" cy="1588696"/>
-            </a:xfrm>
-            <a:custGeom>
-              <a:avLst/>
-              <a:gdLst/>
-              <a:ahLst/>
-              <a:cxnLst/>
-              <a:rect l="l" t="t" r="r" b="b"/>
-              <a:pathLst>
-                <a:path w="1386289" h="1588696">
-                  <a:moveTo>
-                    <a:pt x="0" y="0"/>
-                  </a:moveTo>
-                  <a:lnTo>
-                    <a:pt x="1386289" y="0"/>
-                  </a:lnTo>
-                  <a:lnTo>
-                    <a:pt x="1386289" y="1588696"/>
-                  </a:lnTo>
-                  <a:lnTo>
-                    <a:pt x="0" y="1588696"/>
-                  </a:lnTo>
-                  <a:close/>
-                </a:path>
-              </a:pathLst>
-            </a:custGeom>
-            <a:solidFill>
-              <a:srgbClr val="FFFFFF"/>
-            </a:solidFill>
-            <a:ln w="38100" cap="sq">
-              <a:solidFill>
-                <a:srgbClr val="000000"/>
-              </a:solidFill>
-              <a:prstDash val="solid"/>
-              <a:miter/>
-            </a:ln>
-          </p:spPr>
-          <p:txBody>
-            <a:bodyPr/>
-            <a:lstStyle/>
-            <a:p>
-              <a:endParaRPr lang="es-MX"/>
-            </a:p>
-          </p:txBody>
-        </p:sp>
-        <p:sp>
-          <p:nvSpPr>
-            <p:cNvPr id="27" name="TextBox 27"/>
-            <p:cNvSpPr txBox="1"/>
-            <p:nvPr/>
-          </p:nvSpPr>
-          <p:spPr>
-            <a:xfrm>
-              <a:off x="0" y="-28575"/>
-              <a:ext cx="1386289" cy="1617271"/>
-            </a:xfrm>
-            <a:prstGeom prst="rect">
-              <a:avLst/>
-            </a:prstGeom>
-          </p:spPr>
-          <p:txBody>
-            <a:bodyPr lIns="50800" tIns="50800" rIns="50800" bIns="50800" rtlCol="0" anchor="ctr"/>
-            <a:lstStyle/>
-            <a:p>
-              <a:pPr algn="ctr">
-                <a:lnSpc>
-                  <a:spcPts val="2344"/>
-                </a:lnSpc>
-              </a:pPr>
-              <a:endParaRPr/>
-            </a:p>
-          </p:txBody>
-        </p:sp>
-      </p:grpSp>
-      <p:sp>
-        <p:nvSpPr>
-          <p:cNvPr id="28" name="AutoShape 28"/>
-          <p:cNvSpPr/>
-          <p:nvPr/>
-        </p:nvSpPr>
-        <p:spPr>
-          <a:xfrm>
-            <a:off x="12716150" y="4812703"/>
-            <a:ext cx="4698950" cy="0"/>
-          </a:xfrm>
-          <a:prstGeom prst="line">
-            <a:avLst/>
-          </a:prstGeom>
-          <a:ln w="66675" cap="flat">
-            <a:solidFill>
-              <a:srgbClr val="000000"/>
-            </a:solidFill>
-            <a:prstDash val="solid"/>
-            <a:headEnd type="none" w="sm" len="sm"/>
-            <a:tailEnd type="none" w="sm" len="sm"/>
-          </a:ln>
-        </p:spPr>
-        <p:txBody>
-          <a:bodyPr/>
-          <a:lstStyle/>
-          <a:p>
-            <a:endParaRPr lang="es-MX"/>
-          </a:p>
-        </p:txBody>
-      </p:sp>
-      <p:sp>
-        <p:nvSpPr>
-          <p:cNvPr id="29" name="TextBox 29"/>
-          <p:cNvSpPr txBox="1"/>
-          <p:nvPr/>
-        </p:nvSpPr>
-        <p:spPr>
-          <a:xfrm>
-            <a:off x="3133948" y="1015098"/>
-            <a:ext cx="12436066" cy="1066681"/>
-          </a:xfrm>
-          <a:prstGeom prst="rect">
-            <a:avLst/>
-          </a:prstGeom>
-        </p:spPr>
-        <p:txBody>
-          <a:bodyPr wrap="square" lIns="0" tIns="0" rIns="0" bIns="0" rtlCol="0" anchor="t">
-            <a:spAutoFit/>
-          </a:bodyPr>
-          <a:lstStyle/>
-          <a:p>
-            <a:pPr marL="0" lvl="1" indent="0" algn="ctr">
-              <a:lnSpc>
-                <a:spcPts val="8000"/>
-              </a:lnSpc>
-              <a:spcBef>
-                <a:spcPct val="0"/>
-              </a:spcBef>
-            </a:pPr>
-            <a:r>
-              <a:rPr lang="en-US" sz="8000" b="1" u="none" strike="noStrike" spc="416" dirty="0">
-                <a:solidFill>
-                  <a:srgbClr val="4263EB"/>
-                </a:solidFill>
-                <a:latin typeface="Inter Bold"/>
-                <a:ea typeface="Inter Bold"/>
-                <a:cs typeface="Inter Bold"/>
-                <a:sym typeface="Inter Bold"/>
-              </a:rPr>
-              <a:t>Subscription Plans</a:t>
-            </a:r>
-          </a:p>
-        </p:txBody>
-      </p:sp>
-      <p:sp>
-        <p:nvSpPr>
-          <p:cNvPr id="30" name="TextBox 30"/>
-          <p:cNvSpPr txBox="1"/>
-          <p:nvPr/>
-        </p:nvSpPr>
-        <p:spPr>
-          <a:xfrm>
-            <a:off x="6641440" y="5316167"/>
-            <a:ext cx="4607135" cy="3569284"/>
-          </a:xfrm>
-          <a:prstGeom prst="rect">
-            <a:avLst/>
-          </a:prstGeom>
-        </p:spPr>
-        <p:txBody>
-          <a:bodyPr lIns="0" tIns="0" rIns="0" bIns="0" rtlCol="0" anchor="t">
-            <a:spAutoFit/>
-          </a:bodyPr>
-          <a:lstStyle/>
-          <a:p>
-            <a:pPr marL="537442" lvl="1" indent="-268721" algn="just">
-              <a:lnSpc>
-                <a:spcPts val="4057"/>
-              </a:lnSpc>
-              <a:buFont typeface="Arial"/>
-              <a:buChar char="•"/>
-            </a:pPr>
-            <a:r>
-              <a:rPr lang="en-US" sz="2489" b="1">
-                <a:solidFill>
-                  <a:srgbClr val="000000"/>
-                </a:solidFill>
-                <a:latin typeface="Helios Bold"/>
-                <a:ea typeface="Helios Bold"/>
-                <a:cs typeface="Helios Bold"/>
-                <a:sym typeface="Helios Bold"/>
-              </a:rPr>
-              <a:t>Unlimited builds.</a:t>
-            </a:r>
-          </a:p>
-          <a:p>
-            <a:pPr marL="537442" lvl="1" indent="-268721" algn="just">
-              <a:lnSpc>
-                <a:spcPts val="4057"/>
-              </a:lnSpc>
-              <a:buFont typeface="Arial"/>
-              <a:buChar char="•"/>
-            </a:pPr>
-            <a:r>
-              <a:rPr lang="en-US" sz="2489">
-                <a:solidFill>
-                  <a:srgbClr val="000000"/>
-                </a:solidFill>
-                <a:latin typeface="Helios"/>
-                <a:ea typeface="Helios"/>
-                <a:cs typeface="Helios"/>
-                <a:sym typeface="Helios"/>
-              </a:rPr>
-              <a:t>Customizable web interface (image/video backgrounds).</a:t>
-            </a:r>
-          </a:p>
-          <a:p>
-            <a:pPr marL="537442" lvl="1" indent="-268721" algn="just">
-              <a:lnSpc>
-                <a:spcPts val="4057"/>
-              </a:lnSpc>
-              <a:buFont typeface="Arial"/>
-              <a:buChar char="•"/>
-            </a:pPr>
-            <a:r>
-              <a:rPr lang="en-US" sz="2489">
-                <a:solidFill>
-                  <a:srgbClr val="000000"/>
-                </a:solidFill>
-                <a:latin typeface="Helios"/>
-                <a:ea typeface="Helios"/>
-                <a:cs typeface="Helios"/>
-                <a:sym typeface="Helios"/>
-              </a:rPr>
-              <a:t>Full report downloads (.JSON, .ASM, and .out binaries).</a:t>
-            </a:r>
-          </a:p>
-          <a:p>
-            <a:pPr marL="537442" lvl="1" indent="-268721" algn="just">
-              <a:lnSpc>
-                <a:spcPts val="4057"/>
-              </a:lnSpc>
-              <a:buFont typeface="Arial"/>
-              <a:buChar char="•"/>
-            </a:pPr>
-            <a:r>
-              <a:rPr lang="en-US" sz="2489">
-                <a:solidFill>
-                  <a:srgbClr val="000000"/>
-                </a:solidFill>
-                <a:latin typeface="Helios"/>
-                <a:ea typeface="Helios"/>
-                <a:cs typeface="Helios"/>
-                <a:sym typeface="Helios"/>
-              </a:rPr>
-              <a:t>Priority technical support.</a:t>
-            </a:r>
-          </a:p>
-        </p:txBody>
-      </p:sp>
-      <p:sp>
-        <p:nvSpPr>
-          <p:cNvPr id="31" name="TextBox 31"/>
-          <p:cNvSpPr txBox="1"/>
-          <p:nvPr/>
-        </p:nvSpPr>
-        <p:spPr>
-          <a:xfrm>
-            <a:off x="6708115" y="3536131"/>
-            <a:ext cx="3695941" cy="660400"/>
-          </a:xfrm>
-          <a:prstGeom prst="rect">
-            <a:avLst/>
-          </a:prstGeom>
-        </p:spPr>
-        <p:txBody>
-          <a:bodyPr wrap="square" lIns="0" tIns="0" rIns="0" bIns="0" rtlCol="0" anchor="t">
-            <a:spAutoFit/>
-          </a:bodyPr>
-          <a:lstStyle/>
-          <a:p>
-            <a:pPr algn="ctr">
-              <a:lnSpc>
-                <a:spcPts val="5000"/>
-              </a:lnSpc>
-            </a:pPr>
-            <a:r>
-              <a:rPr lang="en-US" sz="5000" b="1" spc="260" dirty="0">
-                <a:solidFill>
-                  <a:srgbClr val="262262"/>
-                </a:solidFill>
-                <a:latin typeface="Inter Bold"/>
-                <a:ea typeface="Inter Bold"/>
-                <a:cs typeface="Inter Bold"/>
-                <a:sym typeface="Inter Bold"/>
-              </a:rPr>
-              <a:t>Pro-load</a:t>
-            </a:r>
-          </a:p>
-        </p:txBody>
-      </p:sp>
-      <p:sp>
-        <p:nvSpPr>
-          <p:cNvPr id="32" name="TextBox 32"/>
-          <p:cNvSpPr txBox="1"/>
-          <p:nvPr/>
-        </p:nvSpPr>
-        <p:spPr>
-          <a:xfrm>
-            <a:off x="6708114" y="4272731"/>
-            <a:ext cx="4607135" cy="530225"/>
-          </a:xfrm>
-          <a:prstGeom prst="rect">
-            <a:avLst/>
-          </a:prstGeom>
-        </p:spPr>
-        <p:txBody>
-          <a:bodyPr wrap="square" lIns="0" tIns="0" rIns="0" bIns="0" rtlCol="0" anchor="t">
-            <a:spAutoFit/>
-          </a:bodyPr>
-          <a:lstStyle/>
-          <a:p>
-            <a:pPr algn="ctr">
-              <a:lnSpc>
-                <a:spcPts val="3999"/>
-              </a:lnSpc>
-            </a:pPr>
-            <a:r>
-              <a:rPr lang="en-US" sz="3999" b="1" spc="207" dirty="0">
-                <a:solidFill>
-                  <a:srgbClr val="FFFFFF"/>
-                </a:solidFill>
-                <a:latin typeface="Inter Bold"/>
-                <a:ea typeface="Inter Bold"/>
-                <a:cs typeface="Inter Bold"/>
-                <a:sym typeface="Inter Bold"/>
-              </a:rPr>
-              <a:t>$15 USD/month</a:t>
-            </a:r>
-          </a:p>
-        </p:txBody>
-      </p:sp>
-      <p:sp>
-        <p:nvSpPr>
-          <p:cNvPr id="33" name="TextBox 33"/>
-          <p:cNvSpPr txBox="1"/>
-          <p:nvPr/>
-        </p:nvSpPr>
-        <p:spPr>
-          <a:xfrm>
-            <a:off x="6900302" y="2719337"/>
-            <a:ext cx="4395898" cy="486156"/>
-          </a:xfrm>
-          <a:prstGeom prst="rect">
-            <a:avLst/>
-          </a:prstGeom>
-        </p:spPr>
-        <p:txBody>
-          <a:bodyPr lIns="0" tIns="0" rIns="0" bIns="0" rtlCol="0" anchor="t">
-            <a:spAutoFit/>
-          </a:bodyPr>
-          <a:lstStyle/>
-          <a:p>
-            <a:pPr algn="ctr">
-              <a:lnSpc>
-                <a:spcPts val="3911"/>
-              </a:lnSpc>
-            </a:pPr>
-            <a:r>
-              <a:rPr lang="en-US" sz="2400" b="1">
-                <a:solidFill>
-                  <a:srgbClr val="FFFFFF"/>
-                </a:solidFill>
-                <a:latin typeface="Helios Bold"/>
-                <a:ea typeface="Helios Bold"/>
-                <a:cs typeface="Helios Bold"/>
-                <a:sym typeface="Helios Bold"/>
-              </a:rPr>
-              <a:t>OFFER</a:t>
-            </a:r>
-            <a:r>
-              <a:rPr lang="en-US" sz="2400" b="1" u="none" strike="noStrike">
-                <a:solidFill>
-                  <a:srgbClr val="FFFFFF"/>
-                </a:solidFill>
-                <a:latin typeface="Helios Bold"/>
-                <a:ea typeface="Helios Bold"/>
-                <a:cs typeface="Helios Bold"/>
-                <a:sym typeface="Helios Bold"/>
-              </a:rPr>
-              <a:t>: $5/month (3 months)</a:t>
-            </a:r>
-          </a:p>
-        </p:txBody>
-      </p:sp>
-      <p:sp>
-        <p:nvSpPr>
-          <p:cNvPr id="34" name="TextBox 34"/>
-          <p:cNvSpPr txBox="1"/>
-          <p:nvPr/>
-        </p:nvSpPr>
-        <p:spPr>
-          <a:xfrm>
-            <a:off x="708273" y="4986758"/>
-            <a:ext cx="4547424" cy="3564952"/>
-          </a:xfrm>
-          <a:prstGeom prst="rect">
-            <a:avLst/>
-          </a:prstGeom>
-        </p:spPr>
-        <p:txBody>
-          <a:bodyPr lIns="0" tIns="0" rIns="0" bIns="0" rtlCol="0" anchor="t">
-            <a:spAutoFit/>
-          </a:bodyPr>
-          <a:lstStyle/>
-          <a:p>
-            <a:pPr marL="537442" lvl="1" indent="-268721" algn="just">
-              <a:lnSpc>
-                <a:spcPts val="4057"/>
-              </a:lnSpc>
-              <a:buFont typeface="Arial"/>
-              <a:buChar char="•"/>
-            </a:pPr>
-            <a:r>
-              <a:rPr lang="en-US" sz="2489">
-                <a:solidFill>
-                  <a:srgbClr val="000000"/>
-                </a:solidFill>
-                <a:latin typeface="Helios"/>
-                <a:ea typeface="Helios"/>
-                <a:cs typeface="Helios"/>
-                <a:sym typeface="Helios"/>
-              </a:rPr>
-              <a:t>Full analysis (Lexical, Semantic, Visual SDT, Optimized Code, TAC, ASM).</a:t>
-            </a:r>
-          </a:p>
-          <a:p>
-            <a:pPr marL="537442" lvl="1" indent="-268721" algn="just">
-              <a:lnSpc>
-                <a:spcPts val="4057"/>
-              </a:lnSpc>
-              <a:buFont typeface="Arial"/>
-              <a:buChar char="•"/>
-            </a:pPr>
-            <a:r>
-              <a:rPr lang="en-US" sz="2489">
-                <a:solidFill>
-                  <a:srgbClr val="000000"/>
-                </a:solidFill>
-                <a:latin typeface="Helios"/>
-                <a:ea typeface="Helios"/>
-                <a:cs typeface="Helios"/>
-                <a:sym typeface="Helios"/>
-              </a:rPr>
-              <a:t>Standard interface (static).</a:t>
-            </a:r>
-          </a:p>
-          <a:p>
-            <a:pPr marL="537442" lvl="1" indent="-268721" algn="just">
-              <a:lnSpc>
-                <a:spcPts val="4057"/>
-              </a:lnSpc>
-              <a:buFont typeface="Arial"/>
-              <a:buChar char="•"/>
-            </a:pPr>
-            <a:r>
-              <a:rPr lang="en-US" sz="2489">
-                <a:solidFill>
-                  <a:srgbClr val="000000"/>
-                </a:solidFill>
-                <a:latin typeface="Helios"/>
-                <a:ea typeface="Helios"/>
-                <a:cs typeface="Helios"/>
-                <a:sym typeface="Helios"/>
-              </a:rPr>
-              <a:t>Limit of 5 to 10 compilations per day.</a:t>
-            </a:r>
-          </a:p>
-        </p:txBody>
-      </p:sp>
-      <p:sp>
-        <p:nvSpPr>
-          <p:cNvPr id="35" name="TextBox 35"/>
-          <p:cNvSpPr txBox="1"/>
-          <p:nvPr/>
-        </p:nvSpPr>
-        <p:spPr>
-          <a:xfrm>
-            <a:off x="846060" y="3201977"/>
-            <a:ext cx="3925729" cy="660400"/>
-          </a:xfrm>
-          <a:prstGeom prst="rect">
-            <a:avLst/>
-          </a:prstGeom>
-        </p:spPr>
-        <p:txBody>
-          <a:bodyPr wrap="square" lIns="0" tIns="0" rIns="0" bIns="0" rtlCol="0" anchor="t">
-            <a:spAutoFit/>
-          </a:bodyPr>
-          <a:lstStyle/>
-          <a:p>
-            <a:pPr algn="ctr">
-              <a:lnSpc>
-                <a:spcPts val="5000"/>
-              </a:lnSpc>
-            </a:pPr>
-            <a:r>
-              <a:rPr lang="en-US" sz="5000" b="1" spc="260" dirty="0">
-                <a:solidFill>
-                  <a:srgbClr val="262262"/>
-                </a:solidFill>
-                <a:latin typeface="Inter Bold"/>
-                <a:ea typeface="Inter Bold"/>
-                <a:cs typeface="Inter Bold"/>
-                <a:sym typeface="Inter Bold"/>
-              </a:rPr>
-              <a:t>Free-load</a:t>
-            </a:r>
-          </a:p>
-        </p:txBody>
-      </p:sp>
-      <p:sp>
-        <p:nvSpPr>
-          <p:cNvPr id="36" name="TextBox 36"/>
-          <p:cNvSpPr txBox="1"/>
-          <p:nvPr/>
-        </p:nvSpPr>
-        <p:spPr>
-          <a:xfrm>
-            <a:off x="846060" y="3938577"/>
-            <a:ext cx="4542780" cy="530225"/>
-          </a:xfrm>
-          <a:prstGeom prst="rect">
-            <a:avLst/>
-          </a:prstGeom>
-        </p:spPr>
-        <p:txBody>
-          <a:bodyPr wrap="square" lIns="0" tIns="0" rIns="0" bIns="0" rtlCol="0" anchor="t">
-            <a:spAutoFit/>
-          </a:bodyPr>
-          <a:lstStyle/>
-          <a:p>
-            <a:pPr algn="ctr">
-              <a:lnSpc>
-                <a:spcPts val="3999"/>
-              </a:lnSpc>
-            </a:pPr>
-            <a:r>
-              <a:rPr lang="en-US" sz="3999" b="1" spc="207" dirty="0">
-                <a:solidFill>
-                  <a:srgbClr val="737373"/>
-                </a:solidFill>
-                <a:latin typeface="Inter Bold"/>
-                <a:ea typeface="Inter Bold"/>
-                <a:cs typeface="Inter Bold"/>
-                <a:sym typeface="Inter Bold"/>
-              </a:rPr>
-              <a:t>$0 USD/month</a:t>
-            </a:r>
-          </a:p>
-        </p:txBody>
-      </p:sp>
-      <p:sp>
-        <p:nvSpPr>
-          <p:cNvPr id="37" name="TextBox 37"/>
-          <p:cNvSpPr txBox="1"/>
-          <p:nvPr/>
-        </p:nvSpPr>
-        <p:spPr>
-          <a:xfrm>
-            <a:off x="12639950" y="5059196"/>
-            <a:ext cx="4547424" cy="3569265"/>
-          </a:xfrm>
-          <a:prstGeom prst="rect">
-            <a:avLst/>
-          </a:prstGeom>
-        </p:spPr>
-        <p:txBody>
-          <a:bodyPr lIns="0" tIns="0" rIns="0" bIns="0" rtlCol="0" anchor="t">
-            <a:spAutoFit/>
-          </a:bodyPr>
-          <a:lstStyle/>
-          <a:p>
-            <a:pPr marL="537442" lvl="1" indent="-268721" algn="just">
-              <a:lnSpc>
-                <a:spcPts val="4057"/>
-              </a:lnSpc>
-              <a:buFont typeface="Arial"/>
-              <a:buChar char="•"/>
-            </a:pPr>
-            <a:r>
-              <a:rPr lang="en-US" sz="2489">
-                <a:solidFill>
-                  <a:srgbClr val="000000"/>
-                </a:solidFill>
-                <a:latin typeface="Helios"/>
-                <a:ea typeface="Helios"/>
-                <a:cs typeface="Helios"/>
-                <a:sym typeface="Helios"/>
-              </a:rPr>
-              <a:t>All Pro benefits at half price.</a:t>
-            </a:r>
-          </a:p>
-          <a:p>
-            <a:pPr marL="537442" lvl="1" indent="-268721" algn="just">
-              <a:lnSpc>
-                <a:spcPts val="4057"/>
-              </a:lnSpc>
-              <a:buFont typeface="Arial"/>
-              <a:buChar char="•"/>
-            </a:pPr>
-            <a:r>
-              <a:rPr lang="en-US" sz="2489">
-                <a:solidFill>
-                  <a:srgbClr val="000000"/>
-                </a:solidFill>
-                <a:latin typeface="Helios"/>
-                <a:ea typeface="Helios"/>
-                <a:cs typeface="Helios"/>
-                <a:sym typeface="Helios"/>
-              </a:rPr>
-              <a:t>Rate guaranteed for 3 years.</a:t>
-            </a:r>
-          </a:p>
-          <a:p>
-            <a:pPr marL="537591" lvl="1" indent="-268796" algn="just">
-              <a:lnSpc>
-                <a:spcPts val="4058"/>
-              </a:lnSpc>
-              <a:buFont typeface="Arial"/>
-              <a:buChar char="•"/>
-            </a:pPr>
-            <a:r>
-              <a:rPr lang="en-US" sz="2490" i="1">
-                <a:solidFill>
-                  <a:srgbClr val="000000"/>
-                </a:solidFill>
-                <a:latin typeface="Helios Italics"/>
-                <a:ea typeface="Helios Italics"/>
-                <a:cs typeface="Helios Italics"/>
-                <a:sym typeface="Helios Italics"/>
-              </a:rPr>
-              <a:t>Requires an application via institutional email, including proof of enrollment and academic transcript.</a:t>
-            </a:r>
-          </a:p>
-        </p:txBody>
-      </p:sp>
-      <p:sp>
-        <p:nvSpPr>
-          <p:cNvPr id="38" name="TextBox 38"/>
-          <p:cNvSpPr txBox="1"/>
-          <p:nvPr/>
-        </p:nvSpPr>
-        <p:spPr>
-          <a:xfrm>
-            <a:off x="12745482" y="3274416"/>
-            <a:ext cx="3662244" cy="660400"/>
-          </a:xfrm>
-          <a:prstGeom prst="rect">
-            <a:avLst/>
-          </a:prstGeom>
-        </p:spPr>
-        <p:txBody>
-          <a:bodyPr lIns="0" tIns="0" rIns="0" bIns="0" rtlCol="0" anchor="t">
-            <a:spAutoFit/>
-          </a:bodyPr>
-          <a:lstStyle/>
-          <a:p>
-            <a:pPr algn="ctr">
-              <a:lnSpc>
-                <a:spcPts val="5000"/>
-              </a:lnSpc>
-            </a:pPr>
-            <a:r>
-              <a:rPr lang="en-US" sz="5000" b="1" spc="260" dirty="0">
-                <a:solidFill>
-                  <a:srgbClr val="262262"/>
-                </a:solidFill>
-                <a:latin typeface="Inter Bold"/>
-                <a:ea typeface="Inter Bold"/>
-                <a:cs typeface="Inter Bold"/>
-                <a:sym typeface="Inter Bold"/>
-              </a:rPr>
-              <a:t>University </a:t>
-            </a:r>
-          </a:p>
-        </p:txBody>
-      </p:sp>
-      <p:sp>
-        <p:nvSpPr>
-          <p:cNvPr id="39" name="TextBox 39"/>
-          <p:cNvSpPr txBox="1"/>
-          <p:nvPr/>
-        </p:nvSpPr>
-        <p:spPr>
-          <a:xfrm>
-            <a:off x="12745482" y="4011016"/>
-            <a:ext cx="2708434" cy="530225"/>
-          </a:xfrm>
-          <a:prstGeom prst="rect">
-            <a:avLst/>
-          </a:prstGeom>
-        </p:spPr>
-        <p:txBody>
-          <a:bodyPr lIns="0" tIns="0" rIns="0" bIns="0" rtlCol="0" anchor="t">
-            <a:spAutoFit/>
-          </a:bodyPr>
-          <a:lstStyle/>
-          <a:p>
-            <a:pPr algn="ctr">
-              <a:lnSpc>
-                <a:spcPts val="3999"/>
-              </a:lnSpc>
-            </a:pPr>
-            <a:r>
-              <a:rPr lang="en-US" sz="3999" b="1" spc="207">
-                <a:solidFill>
-                  <a:srgbClr val="737373"/>
-                </a:solidFill>
-                <a:latin typeface="Inter Bold"/>
-                <a:ea typeface="Inter Bold"/>
-                <a:cs typeface="Inter Bold"/>
-                <a:sym typeface="Inter Bold"/>
-              </a:rPr>
-              <a:t>-50% OFF</a:t>
             </a:r>
           </a:p>
         </p:txBody>
